--- a/Genetica Grupal/Poster_bioinfo_grupo12_v5.pptx
+++ b/Genetica Grupal/Poster_bioinfo_grupo12_v5.pptx
@@ -115,6 +115,18 @@
 </p:presentation>
 </file>
 
+<file path=ppt/commentAuthors.xml><?xml version="1.0" encoding="utf-8"?>
+<p:cmAuthorLst xmlns:a="http://schemas.openxmlformats.org/drawingml/2006/main" xmlns:r="http://schemas.openxmlformats.org/officeDocument/2006/relationships" xmlns:p="http://schemas.openxmlformats.org/presentationml/2006/main">
+  <p:cmAuthor id="1" name="Pedro García" initials="PG" lastIdx="4" clrIdx="0">
+    <p:extLst>
+      <p:ext uri="{19B8F6BF-5375-455C-9EA6-DF929625EA0E}">
+        <p15:presenceInfo xmlns:p15="http://schemas.microsoft.com/office/powerpoint/2012/main" userId="S::pgarcia@stoller.es::cf999d9a-c9a7-46a8-bf6e-7f4789723d82" providerId="AD"/>
+      </p:ext>
+    </p:extLst>
+  </p:cmAuthor>
+</p:cmAuthorLst>
+</file>
+
 <file path=ppt/revisionInfo.xml><?xml version="1.0" encoding="utf-8"?>
 <p1510:revInfo xmlns:a="http://schemas.openxmlformats.org/drawingml/2006/main" xmlns:r="http://schemas.openxmlformats.org/officeDocument/2006/relationships" xmlns:p1510="http://schemas.microsoft.com/office/powerpoint/2015/10/main">
   <p1510:revLst>
@@ -150,6 +162,56 @@
     </pc:docChg>
   </pc:docChgLst>
 </pc:chgInfo>
+</file>
+
+<file path=ppt/comments/comment1.xml><?xml version="1.0" encoding="utf-8"?>
+<p:cmLst xmlns:a="http://schemas.openxmlformats.org/drawingml/2006/main" xmlns:r="http://schemas.openxmlformats.org/officeDocument/2006/relationships" xmlns:p="http://schemas.openxmlformats.org/presentationml/2006/main">
+  <p:cm authorId="1" dt="2026-02-01T22:06:21.326" idx="1">
+    <p:pos x="7965" y="6084"/>
+    <p:text>Esta habría que ponerla dominante, o las dos opciones:</p:text>
+    <p:extLst>
+      <p:ext uri="{C676402C-5697-4E1C-873F-D02D1690AC5C}">
+        <p15:threadingInfo xmlns:p15="http://schemas.microsoft.com/office/powerpoint/2012/main" timeZoneBias="-60"/>
+      </p:ext>
+    </p:extLst>
+  </p:cm>
+  <p:cm authorId="1" dt="2026-02-01T22:18:23.154" idx="2">
+    <p:pos x="7965" y="6220"/>
+    <p:text>Según OMIM: ▼ Inheritance
+The transmission pattern of early-onset severe obesity in the families reported by Yeo et al. (1998) and Vaisse et al. (1998) was consistent with autosomal dominant inheritance.</p:text>
+    <p:extLst>
+      <p:ext uri="{C676402C-5697-4E1C-873F-D02D1690AC5C}">
+        <p15:threadingInfo xmlns:p15="http://schemas.microsoft.com/office/powerpoint/2012/main" timeZoneBias="-60">
+          <p15:parentCm authorId="1" idx="1"/>
+        </p15:threadingInfo>
+      </p:ext>
+    </p:extLst>
+  </p:cm>
+  <p:cm authorId="1" dt="2026-02-01T22:19:55.525" idx="3">
+    <p:pos x="7965" y="6356"/>
+    <p:text>Drabkin et al. (2018) tambien lo muestra.</p:text>
+    <p:extLst>
+      <p:ext uri="{C676402C-5697-4E1C-873F-D02D1690AC5C}">
+        <p15:threadingInfo xmlns:p15="http://schemas.microsoft.com/office/powerpoint/2012/main" timeZoneBias="-60">
+          <p15:parentCm authorId="1" idx="1"/>
+        </p15:threadingInfo>
+      </p:ext>
+    </p:extLst>
+  </p:cm>
+  <p:cm authorId="1" dt="2026-02-01T22:21:28.072" idx="4">
+    <p:pos x="7965" y="6492"/>
+    <p:text>Citas: Drabkin, M., Birk, O. S., Birk, R. Heterozygous versus homozygous phenotype caused by the same MC4R mutation: novel mutation affecting a large consanguineous kindred. BMC Med. Genet. 19: 135, 2018. Note: Electronic Article. [PubMed: 30068297, related citations] [Full Text]
+Vaisse, C., Clement, K., Guy-Grand, B., Froguel, P. A frameshift mutation in human MC4R is associated with a dominant form of obesity. Nature Genet. 20: 113-114, 1998. [PubMed: 9771699, related citations] [Full Text]
+Yeo, G. S. H., Farooqi, I. S., Aminian, S., Halsall, D. J., Stanhope, R. G., O'Rahilly, S. A frameshift mutation in MC4R associated with dominantly inherited human obesity. Nature Genet. 20: 111-112, 1998. [PubMed: 9771698, related citations] [Full Text]</p:text>
+    <p:extLst>
+      <p:ext uri="{C676402C-5697-4E1C-873F-D02D1690AC5C}">
+        <p15:threadingInfo xmlns:p15="http://schemas.microsoft.com/office/powerpoint/2012/main" timeZoneBias="-60">
+          <p15:parentCm authorId="1" idx="1"/>
+        </p15:threadingInfo>
+      </p:ext>
+    </p:extLst>
+  </p:cm>
+</p:cmLst>
 </file>
 
 <file path=ppt/notesMasters/notesMaster1.xml><?xml version="1.0" encoding="utf-8"?>
@@ -234,7 +296,7 @@
           <a:p>
             <a:fld id="{48C9869D-3451-6C43-8CCE-BBD265B9C833}" type="datetimeFigureOut">
               <a:rPr lang="es-ES" smtClean="0"/>
-              <a:t>01/02/2026</a:t>
+              <a:t>1/2/26</a:t>
             </a:fld>
             <a:endParaRPr lang="es-ES"/>
           </a:p>
@@ -3618,16 +3680,6 @@
                 </a:lnSpc>
               </a:pPr>
               <a:r>
-                <a:rPr lang="es-ES_tradnl" sz="1800" b="0" i="1" strike="noStrike" spc="-1" dirty="0" smtClean="0">
-                  <a:solidFill>
-                    <a:srgbClr val="000000"/>
-                  </a:solidFill>
-                  <a:latin typeface="Aptos"/>
-                  <a:ea typeface="DejaVu Sans"/>
-                </a:rPr>
-                <a:t>Maggie </a:t>
-              </a:r>
-              <a:r>
                 <a:rPr lang="es-ES_tradnl" sz="1800" b="0" i="1" strike="noStrike" spc="-1" dirty="0">
                   <a:solidFill>
                     <a:srgbClr val="000000"/>
@@ -3635,7 +3687,7 @@
                   <a:latin typeface="Aptos"/>
                   <a:ea typeface="DejaVu Sans"/>
                 </a:rPr>
-                <a:t>presenta una </a:t>
+                <a:t>Maggie presenta una </a:t>
               </a:r>
               <a:r>
                 <a:rPr lang="es-ES_tradnl" sz="1800" b="0" i="1" strike="noStrike" spc="-1" dirty="0" err="1">
@@ -3755,17 +3807,17 @@
                   <a:latin typeface="Aptos"/>
                   <a:ea typeface="DejaVu Sans"/>
                 </a:rPr>
-                <a:t>Abraham y </a:t>
+                <a:t>Abraham y Maggie presentan una sustitución en el gen receptor de la </a:t>
               </a:r>
               <a:r>
-                <a:rPr lang="es-ES_tradnl" sz="1800" b="0" i="1" strike="noStrike" spc="-1" dirty="0" smtClean="0">
+                <a:rPr lang="es-ES_tradnl" sz="1800" b="0" i="1" strike="noStrike" spc="-1" dirty="0" err="1">
                   <a:solidFill>
                     <a:srgbClr val="000000"/>
                   </a:solidFill>
                   <a:latin typeface="Aptos"/>
                   <a:ea typeface="DejaVu Sans"/>
                 </a:rPr>
-                <a:t>Maggie </a:t>
+                <a:t>melanocortina</a:t>
               </a:r>
               <a:r>
                 <a:rPr lang="es-ES_tradnl" sz="1800" b="0" i="1" strike="noStrike" spc="-1" dirty="0">
@@ -3775,37 +3827,7 @@
                   <a:latin typeface="Aptos"/>
                   <a:ea typeface="DejaVu Sans"/>
                 </a:rPr>
-                <a:t>presentan una sustitución en el gen receptor de la </a:t>
-              </a:r>
-              <a:r>
-                <a:rPr lang="es-ES_tradnl" sz="1800" b="0" i="1" strike="noStrike" spc="-1" dirty="0" err="1" smtClean="0">
-                  <a:solidFill>
-                    <a:srgbClr val="000000"/>
-                  </a:solidFill>
-                  <a:latin typeface="Aptos"/>
-                  <a:ea typeface="DejaVu Sans"/>
-                </a:rPr>
-                <a:t>melanocortina</a:t>
-              </a:r>
-              <a:r>
-                <a:rPr lang="es-ES_tradnl" sz="1800" b="0" i="1" strike="noStrike" spc="-1" dirty="0" smtClean="0">
-                  <a:solidFill>
-                    <a:srgbClr val="000000"/>
-                  </a:solidFill>
-                  <a:latin typeface="Aptos"/>
-                  <a:ea typeface="DejaVu Sans"/>
-                </a:rPr>
-                <a:t> </a:t>
-              </a:r>
-              <a:r>
-                <a:rPr lang="es-ES_tradnl" sz="1800" b="0" i="1" strike="noStrike" spc="-1" dirty="0">
-                  <a:solidFill>
-                    <a:srgbClr val="000000"/>
-                  </a:solidFill>
-                  <a:latin typeface="Aptos"/>
-                  <a:ea typeface="DejaVu Sans"/>
-                </a:rPr>
-                <a:t>4 (MC4R) que provoca una mutación “</a:t>
+                <a:t> 4 (MC4R) que provoca una mutación “</a:t>
               </a:r>
               <a:r>
                 <a:rPr lang="es-ES_tradnl" sz="1800" b="0" i="1" strike="noStrike" spc="-1" dirty="0" err="1">
@@ -3825,47 +3847,7 @@
                   <a:latin typeface="Aptos"/>
                   <a:ea typeface="DejaVu Sans"/>
                 </a:rPr>
-                <a:t>” que altera un dominio extracelular y crucial para la </a:t>
-              </a:r>
-              <a:r>
-                <a:rPr lang="es-ES_tradnl" sz="1800" b="0" i="1" strike="noStrike" spc="-1" dirty="0" smtClean="0">
-                  <a:solidFill>
-                    <a:srgbClr val="000000"/>
-                  </a:solidFill>
-                  <a:latin typeface="Aptos"/>
-                  <a:ea typeface="DejaVu Sans"/>
-                </a:rPr>
-                <a:t>señalización</a:t>
-              </a:r>
-              <a:r>
-                <a:rPr lang="es-ES_tradnl" sz="1800" b="0" i="1" strike="noStrike" spc="-1" dirty="0">
-                  <a:solidFill>
-                    <a:srgbClr val="000000"/>
-                  </a:solidFill>
-                  <a:latin typeface="Aptos"/>
-                  <a:ea typeface="DejaVu Sans"/>
-                </a:rPr>
-                <a:t>. Esta alteración es altamente patogénica, afectando a una región altamente conservada evolutivamente. Se ve alterada la ruta de </a:t>
-              </a:r>
-              <a:r>
-                <a:rPr lang="es-ES_tradnl" sz="1800" b="0" i="1" strike="noStrike" spc="-1" dirty="0" smtClean="0">
-                  <a:solidFill>
-                    <a:srgbClr val="000000"/>
-                  </a:solidFill>
-                  <a:latin typeface="Aptos"/>
-                  <a:ea typeface="DejaVu Sans"/>
-                </a:rPr>
-                <a:t>señalización </a:t>
-              </a:r>
-              <a:r>
-                <a:rPr lang="es-ES_tradnl" sz="1800" b="0" i="1" strike="noStrike" spc="-1" dirty="0">
-                  <a:solidFill>
-                    <a:srgbClr val="000000"/>
-                  </a:solidFill>
-                  <a:latin typeface="Aptos"/>
-                  <a:ea typeface="DejaVu Sans"/>
-                </a:rPr>
-                <a:t>hormonal del </a:t>
+                <a:t>” que altera un dominio extracelular y crucial para la señalización. Esta alteración es altamente patogénica, afectando a una región altamente conservada evolutivamente. Se ve alterada la ruta de señalización hormonal del </a:t>
               </a:r>
               <a:r>
                 <a:rPr lang="es-ES_tradnl" sz="1800" b="0" i="1" strike="noStrike" spc="-1" dirty="0" err="1">
@@ -4336,16 +4318,6 @@
               <a:t>Figura 1. </a:t>
             </a:r>
             <a:r>
-              <a:rPr lang="es-ES_tradnl" sz="1800" b="0" strike="noStrike" spc="-1" dirty="0" smtClean="0">
-                <a:solidFill>
-                  <a:srgbClr val="000000"/>
-                </a:solidFill>
-                <a:latin typeface="Aptos"/>
-                <a:ea typeface="DejaVu Sans"/>
-              </a:rPr>
-              <a:t>Secuencia proteica </a:t>
-            </a:r>
-            <a:r>
               <a:rPr lang="es-ES_tradnl" sz="1800" b="0" strike="noStrike" spc="-1" dirty="0">
                 <a:solidFill>
                   <a:srgbClr val="000000"/>
@@ -4353,7 +4325,7 @@
                 <a:latin typeface="Aptos"/>
                 <a:ea typeface="DejaVu Sans"/>
               </a:rPr>
-              <a:t>de LEPR </a:t>
+              <a:t>Secuencia proteica de LEPR </a:t>
             </a:r>
             <a:r>
               <a:rPr lang="es-ES_tradnl" sz="1800" b="0" i="1" strike="noStrike" spc="-1" dirty="0" err="1">
@@ -4373,27 +4345,7 @@
                 <a:latin typeface="Aptos"/>
                 <a:ea typeface="DejaVu Sans"/>
               </a:rPr>
-              <a:t> y </a:t>
-            </a:r>
-            <a:r>
-              <a:rPr lang="es-ES_tradnl" sz="1800" b="0" strike="noStrike" spc="-1" dirty="0" smtClean="0">
-                <a:solidFill>
-                  <a:srgbClr val="000000"/>
-                </a:solidFill>
-                <a:latin typeface="Aptos"/>
-                <a:ea typeface="DejaVu Sans"/>
-              </a:rPr>
-              <a:t>su variante</a:t>
-            </a:r>
-            <a:r>
-              <a:rPr lang="es-ES_tradnl" sz="1800" b="0" strike="noStrike" spc="-1" dirty="0">
-                <a:solidFill>
-                  <a:srgbClr val="000000"/>
-                </a:solidFill>
-                <a:latin typeface="Aptos"/>
-                <a:ea typeface="DejaVu Sans"/>
-              </a:rPr>
-              <a:t>.</a:t>
+              <a:t> y su variante.</a:t>
             </a:r>
             <a:endParaRPr lang="es-ES" sz="1800" b="0" strike="noStrike" spc="-1" dirty="0">
               <a:latin typeface="Arial"/>
@@ -4470,27 +4422,7 @@
                 <a:latin typeface="Aptos"/>
                 <a:ea typeface="DejaVu Sans"/>
               </a:rPr>
-              <a:t>Alineamiento múltiple de MCR4 </a:t>
-            </a:r>
-            <a:r>
-              <a:rPr lang="es-ES_tradnl" sz="1800" b="0" strike="noStrike" spc="-1" dirty="0" smtClean="0">
-                <a:solidFill>
-                  <a:srgbClr val="000000"/>
-                </a:solidFill>
-                <a:latin typeface="Aptos"/>
-                <a:ea typeface="DejaVu Sans"/>
-              </a:rPr>
-              <a:t>con CLUSTAL </a:t>
-            </a:r>
-            <a:r>
-              <a:rPr lang="es-ES_tradnl" sz="1800" b="0" strike="noStrike" spc="-1" dirty="0">
-                <a:solidFill>
-                  <a:srgbClr val="000000"/>
-                </a:solidFill>
-                <a:latin typeface="Aptos"/>
-                <a:ea typeface="DejaVu Sans"/>
-              </a:rPr>
-              <a:t>Omega.</a:t>
+              <a:t>Alineamiento múltiple de MCR4 con CLUSTAL Omega.</a:t>
             </a:r>
             <a:endParaRPr lang="es-ES" sz="1800" b="0" strike="noStrike" spc="-1" dirty="0">
               <a:latin typeface="Arial"/>
@@ -4505,14 +4437,14 @@
           <p:nvPr>
             <p:extLst>
               <p:ext uri="{D42A27DB-BD31-4B8C-83A1-F6EECF244321}">
-                <p14:modId xmlns:p14="http://schemas.microsoft.com/office/powerpoint/2010/main" val="477799255"/>
+                <p14:modId xmlns:p14="http://schemas.microsoft.com/office/powerpoint/2010/main" val="853382669"/>
               </p:ext>
             </p:extLst>
           </p:nvPr>
         </p:nvGraphicFramePr>
         <p:xfrm>
           <a:off x="207720" y="8313480"/>
-          <a:ext cx="14436720" cy="3216240"/>
+          <a:ext cx="14436720" cy="3067200"/>
         </p:xfrm>
         <a:graphic>
           <a:graphicData uri="http://schemas.openxmlformats.org/drawingml/2006/table">
@@ -4554,42 +4486,42 @@
                     </a:ext>
                   </a:extLst>
                 </a:gridCol>
-                <a:gridCol w="1025640">
+                <a:gridCol w="844605">
                   <a:extLst>
                     <a:ext uri="{9D8B030D-6E8A-4147-A177-3AD203B41FA5}">
                       <a16:colId xmlns:a16="http://schemas.microsoft.com/office/drawing/2014/main" val="20005"/>
                     </a:ext>
                   </a:extLst>
                 </a:gridCol>
-                <a:gridCol w="1460520">
+                <a:gridCol w="1428750">
                   <a:extLst>
                     <a:ext uri="{9D8B030D-6E8A-4147-A177-3AD203B41FA5}">
                       <a16:colId xmlns:a16="http://schemas.microsoft.com/office/drawing/2014/main" val="20006"/>
                     </a:ext>
                   </a:extLst>
                 </a:gridCol>
-                <a:gridCol w="1482840">
+                <a:gridCol w="1695645">
                   <a:extLst>
                     <a:ext uri="{9D8B030D-6E8A-4147-A177-3AD203B41FA5}">
                       <a16:colId xmlns:a16="http://schemas.microsoft.com/office/drawing/2014/main" val="20007"/>
                     </a:ext>
                   </a:extLst>
                 </a:gridCol>
-                <a:gridCol w="958680">
+                <a:gridCol w="790380">
                   <a:extLst>
                     <a:ext uri="{9D8B030D-6E8A-4147-A177-3AD203B41FA5}">
                       <a16:colId xmlns:a16="http://schemas.microsoft.com/office/drawing/2014/main" val="20008"/>
                     </a:ext>
                   </a:extLst>
                 </a:gridCol>
-                <a:gridCol w="825120">
+                <a:gridCol w="1128713">
                   <a:extLst>
                     <a:ext uri="{9D8B030D-6E8A-4147-A177-3AD203B41FA5}">
                       <a16:colId xmlns:a16="http://schemas.microsoft.com/office/drawing/2014/main" val="20009"/>
                     </a:ext>
                   </a:extLst>
                 </a:gridCol>
-                <a:gridCol w="947520">
+                <a:gridCol w="812227">
                   <a:extLst>
                     <a:ext uri="{9D8B030D-6E8A-4147-A177-3AD203B41FA5}">
                       <a16:colId xmlns:a16="http://schemas.microsoft.com/office/drawing/2014/main" val="20010"/>
@@ -4618,7 +4550,7 @@
                   </a:extLst>
                 </a:gridCol>
               </a:tblGrid>
-              <a:tr h="521640">
+              <a:tr h="324000">
                 <a:tc>
                   <a:txBody>
                     <a:bodyPr/>
@@ -4630,7 +4562,7 @@
                         </a:lnSpc>
                       </a:pPr>
                       <a:r>
-                        <a:rPr lang="es-ES" sz="1200" b="1" u="sng" strike="noStrike" spc="-1">
+                        <a:rPr lang="es-ES" sz="1200" b="1" u="sng" strike="noStrike" spc="-1" dirty="0">
                           <a:solidFill>
                             <a:srgbClr val="000000"/>
                           </a:solidFill>
@@ -4640,7 +4572,7 @@
                         </a:rPr>
                         <a:t>Gen</a:t>
                       </a:r>
-                      <a:endParaRPr lang="es-ES" sz="1200" b="0" strike="noStrike" spc="-1">
+                      <a:endParaRPr lang="es-ES" sz="1200" b="0" strike="noStrike" spc="-1" dirty="0">
                         <a:latin typeface="Arial"/>
                       </a:endParaRPr>
                     </a:p>
@@ -5353,7 +5285,7 @@
                   </a:ext>
                 </a:extLst>
               </a:tr>
-              <a:tr h="774360">
+              <a:tr h="324000">
                 <a:tc>
                   <a:txBody>
                     <a:bodyPr/>
@@ -5365,7 +5297,7 @@
                         </a:lnSpc>
                       </a:pPr>
                       <a:r>
-                        <a:rPr lang="es-ES" sz="1200" b="0" strike="noStrike" spc="-1">
+                        <a:rPr lang="es-ES" sz="1200" b="0" strike="noStrike" spc="-1" dirty="0">
                           <a:solidFill>
                             <a:srgbClr val="000000"/>
                           </a:solidFill>
@@ -5374,7 +5306,7 @@
                         </a:rPr>
                         <a:t>LEPR</a:t>
                       </a:r>
-                      <a:endParaRPr lang="es-ES" sz="1200" b="0" strike="noStrike" spc="-1">
+                      <a:endParaRPr lang="es-ES" sz="1200" b="0" strike="noStrike" spc="-1" dirty="0">
                         <a:latin typeface="Arial"/>
                       </a:endParaRPr>
                     </a:p>
@@ -5416,7 +5348,7 @@
                         </a:lnSpc>
                       </a:pPr>
                       <a:r>
-                        <a:rPr lang="es-ES" sz="1200" b="0" strike="noStrike" spc="-1">
+                        <a:rPr lang="es-ES" sz="1200" b="0" strike="noStrike" spc="-1" dirty="0">
                           <a:solidFill>
                             <a:srgbClr val="000000"/>
                           </a:solidFill>
@@ -5425,7 +5357,7 @@
                         </a:rPr>
                         <a:t>1:65609984</a:t>
                       </a:r>
-                      <a:endParaRPr lang="es-ES" sz="1200" b="0" strike="noStrike" spc="-1">
+                      <a:endParaRPr lang="es-ES" sz="1200" b="0" strike="noStrike" spc="-1" dirty="0">
                         <a:latin typeface="Arial"/>
                       </a:endParaRPr>
                     </a:p>
@@ -5824,7 +5756,7 @@
                         </a:lnSpc>
                       </a:pPr>
                       <a:r>
-                        <a:rPr lang="es-ES" sz="1200" b="0" strike="noStrike" spc="-1" dirty="0" smtClean="0">
+                        <a:rPr lang="es-ES" sz="1200" b="0" strike="noStrike" spc="-1" dirty="0">
                           <a:solidFill>
                             <a:srgbClr val="000000"/>
                           </a:solidFill>
@@ -5875,7 +5807,7 @@
                         </a:lnSpc>
                       </a:pPr>
                       <a:r>
-                        <a:rPr lang="es-ES" sz="1200" b="0" strike="noStrike" spc="-1" smtClean="0">
+                        <a:rPr lang="es-ES" sz="1200" b="0" strike="noStrike" spc="-1">
                           <a:solidFill>
                             <a:srgbClr val="000000"/>
                           </a:solidFill>
@@ -5926,7 +5858,7 @@
                         </a:lnSpc>
                       </a:pPr>
                       <a:r>
-                        <a:rPr lang="es-ES" sz="1200" b="0" strike="noStrike" spc="-1" dirty="0" smtClean="0">
+                        <a:rPr lang="es-ES" sz="1200" b="0" strike="noStrike" spc="-1" dirty="0">
                           <a:solidFill>
                             <a:srgbClr val="000000"/>
                           </a:solidFill>
@@ -6074,7 +6006,7 @@
                   </a:ext>
                 </a:extLst>
               </a:tr>
-              <a:tr h="603720">
+              <a:tr h="324000">
                 <a:tc>
                   <a:txBody>
                     <a:bodyPr/>
@@ -6188,7 +6120,7 @@
                         </a:lnSpc>
                       </a:pPr>
                       <a:r>
-                        <a:rPr lang="es-ES" sz="1200" b="0" strike="noStrike" spc="-1">
+                        <a:rPr lang="es-ES" sz="1200" b="0" strike="noStrike" spc="-1" dirty="0">
                           <a:solidFill>
                             <a:srgbClr val="000000"/>
                           </a:solidFill>
@@ -6197,7 +6129,783 @@
                         </a:rPr>
                         <a:t>ENST00000299766.5:c.815C&gt;A</a:t>
                       </a:r>
+                      <a:endParaRPr lang="es-ES" sz="1200" b="0" strike="noStrike" spc="-1" dirty="0">
+                        <a:latin typeface="Arial"/>
+                      </a:endParaRPr>
+                    </a:p>
+                  </a:txBody>
+                  <a:tcPr marL="7560" marR="7560">
+                    <a:lnL w="12240">
+                      <a:solidFill>
+                        <a:srgbClr val="FFFFFF"/>
+                      </a:solidFill>
+                    </a:lnL>
+                    <a:lnR w="12240">
+                      <a:solidFill>
+                        <a:srgbClr val="FFFFFF"/>
+                      </a:solidFill>
+                    </a:lnR>
+                    <a:lnT w="12240">
+                      <a:solidFill>
+                        <a:srgbClr val="FFFFFF"/>
+                      </a:solidFill>
+                    </a:lnT>
+                    <a:lnB w="12240">
+                      <a:solidFill>
+                        <a:srgbClr val="FFFFFF"/>
+                      </a:solidFill>
+                    </a:lnB>
+                    <a:solidFill>
+                      <a:srgbClr val="E7EAEC"/>
+                    </a:solidFill>
+                  </a:tcPr>
+                </a:tc>
+                <a:tc>
+                  <a:txBody>
+                    <a:bodyPr/>
+                    <a:lstStyle/>
+                    <a:p>
+                      <a:pPr algn="ctr">
+                        <a:lnSpc>
+                          <a:spcPct val="100000"/>
+                        </a:lnSpc>
+                      </a:pPr>
+                      <a:r>
+                        <a:rPr lang="es-ES" sz="1200" b="0" strike="noStrike" spc="-1" dirty="0">
+                          <a:solidFill>
+                            <a:srgbClr val="000000"/>
+                          </a:solidFill>
+                          <a:latin typeface="Aptos"/>
+                          <a:ea typeface="DejaVu Sans"/>
+                        </a:rPr>
+                        <a:t>SNP</a:t>
+                      </a:r>
+                      <a:endParaRPr lang="es-ES" sz="1200" b="0" strike="noStrike" spc="-1" dirty="0">
+                        <a:latin typeface="Arial"/>
+                      </a:endParaRPr>
+                    </a:p>
+                  </a:txBody>
+                  <a:tcPr marL="7560" marR="7560">
+                    <a:lnL w="12240">
+                      <a:solidFill>
+                        <a:srgbClr val="FFFFFF"/>
+                      </a:solidFill>
+                    </a:lnL>
+                    <a:lnR w="12240">
+                      <a:solidFill>
+                        <a:srgbClr val="FFFFFF"/>
+                      </a:solidFill>
+                    </a:lnR>
+                    <a:lnT w="12240">
+                      <a:solidFill>
+                        <a:srgbClr val="FFFFFF"/>
+                      </a:solidFill>
+                    </a:lnT>
+                    <a:lnB w="12240">
+                      <a:solidFill>
+                        <a:srgbClr val="FFFFFF"/>
+                      </a:solidFill>
+                    </a:lnB>
+                    <a:solidFill>
+                      <a:srgbClr val="E7EAEC"/>
+                    </a:solidFill>
+                  </a:tcPr>
+                </a:tc>
+                <a:tc>
+                  <a:txBody>
+                    <a:bodyPr/>
+                    <a:lstStyle/>
+                    <a:p>
+                      <a:pPr algn="ctr">
+                        <a:lnSpc>
+                          <a:spcPct val="100000"/>
+                        </a:lnSpc>
+                      </a:pPr>
+                      <a:r>
+                        <a:rPr lang="es-ES" sz="1200" b="0" strike="noStrike" spc="-1" dirty="0">
+                          <a:solidFill>
+                            <a:srgbClr val="000000"/>
+                          </a:solidFill>
+                          <a:latin typeface="Aptos"/>
+                          <a:ea typeface="DejaVu Sans"/>
+                        </a:rPr>
+                        <a:t>heterocigoto</a:t>
+                      </a:r>
+                      <a:endParaRPr lang="es-ES" sz="1200" b="0" strike="noStrike" spc="-1" dirty="0">
+                        <a:latin typeface="Arial"/>
+                      </a:endParaRPr>
+                    </a:p>
+                  </a:txBody>
+                  <a:tcPr marL="7560" marR="7560">
+                    <a:lnL w="12240">
+                      <a:solidFill>
+                        <a:srgbClr val="FFFFFF"/>
+                      </a:solidFill>
+                    </a:lnL>
+                    <a:lnR w="12240">
+                      <a:solidFill>
+                        <a:srgbClr val="FFFFFF"/>
+                      </a:solidFill>
+                    </a:lnR>
+                    <a:lnT w="12240">
+                      <a:solidFill>
+                        <a:srgbClr val="FFFFFF"/>
+                      </a:solidFill>
+                    </a:lnT>
+                    <a:lnB w="12240">
+                      <a:solidFill>
+                        <a:srgbClr val="FFFFFF"/>
+                      </a:solidFill>
+                    </a:lnB>
+                    <a:solidFill>
+                      <a:srgbClr val="E7EAEC"/>
+                    </a:solidFill>
+                  </a:tcPr>
+                </a:tc>
+                <a:tc>
+                  <a:txBody>
+                    <a:bodyPr/>
+                    <a:lstStyle/>
+                    <a:p>
+                      <a:pPr algn="ctr">
+                        <a:lnSpc>
+                          <a:spcPct val="100000"/>
+                        </a:lnSpc>
+                      </a:pPr>
+                      <a:r>
+                        <a:rPr lang="es-ES" sz="1200" b="0" strike="noStrike" spc="-1" dirty="0">
+                          <a:solidFill>
+                            <a:srgbClr val="000000"/>
+                          </a:solidFill>
+                          <a:latin typeface="Aptos"/>
+                          <a:ea typeface="DejaVu Sans"/>
+                        </a:rPr>
+                        <a:t>6.195x10-7</a:t>
+                      </a:r>
+                      <a:endParaRPr lang="es-ES" sz="1200" b="0" strike="noStrike" spc="-1" dirty="0">
+                        <a:latin typeface="Arial"/>
+                      </a:endParaRPr>
+                    </a:p>
+                    <a:p>
+                      <a:pPr algn="ctr">
+                        <a:lnSpc>
+                          <a:spcPct val="100000"/>
+                        </a:lnSpc>
+                      </a:pPr>
+                      <a:r>
+                        <a:rPr lang="es-ES" sz="1200" b="0" strike="noStrike" spc="-1" dirty="0">
+                          <a:solidFill>
+                            <a:srgbClr val="000000"/>
+                          </a:solidFill>
+                          <a:latin typeface="Aptos"/>
+                          <a:ea typeface="DejaVu Sans"/>
+                        </a:rPr>
+                        <a:t>(mutación)</a:t>
+                      </a:r>
+                      <a:endParaRPr lang="es-ES" sz="1200" b="0" strike="noStrike" spc="-1" dirty="0">
+                        <a:latin typeface="Arial"/>
+                      </a:endParaRPr>
+                    </a:p>
+                  </a:txBody>
+                  <a:tcPr marL="7560" marR="7560">
+                    <a:lnL w="12240">
+                      <a:solidFill>
+                        <a:srgbClr val="FFFFFF"/>
+                      </a:solidFill>
+                    </a:lnL>
+                    <a:lnR w="12240">
+                      <a:solidFill>
+                        <a:srgbClr val="FFFFFF"/>
+                      </a:solidFill>
+                    </a:lnR>
+                    <a:lnT w="12240">
+                      <a:solidFill>
+                        <a:srgbClr val="FFFFFF"/>
+                      </a:solidFill>
+                    </a:lnT>
+                    <a:lnB w="12240">
+                      <a:solidFill>
+                        <a:srgbClr val="FFFFFF"/>
+                      </a:solidFill>
+                    </a:lnB>
+                    <a:solidFill>
+                      <a:srgbClr val="E7EAEC"/>
+                    </a:solidFill>
+                  </a:tcPr>
+                </a:tc>
+                <a:tc>
+                  <a:txBody>
+                    <a:bodyPr/>
+                    <a:lstStyle/>
+                    <a:p>
+                      <a:pPr algn="ctr">
+                        <a:lnSpc>
+                          <a:spcPct val="100000"/>
+                        </a:lnSpc>
+                      </a:pPr>
+                      <a:r>
+                        <a:rPr lang="es-ES" sz="1200" b="0" strike="noStrike" spc="-1" dirty="0">
+                          <a:solidFill>
+                            <a:srgbClr val="000000"/>
+                          </a:solidFill>
+                          <a:latin typeface="Aptos"/>
+                          <a:ea typeface="DejaVu Sans"/>
+                        </a:rPr>
+                        <a:t>ENST00000299766.5</a:t>
+                      </a:r>
+                      <a:endParaRPr lang="es-ES" sz="1200" b="0" strike="noStrike" spc="-1" dirty="0">
+                        <a:latin typeface="Arial"/>
+                      </a:endParaRPr>
+                    </a:p>
+                  </a:txBody>
+                  <a:tcPr marL="7560" marR="7560">
+                    <a:lnL w="12240">
+                      <a:solidFill>
+                        <a:srgbClr val="FFFFFF"/>
+                      </a:solidFill>
+                    </a:lnL>
+                    <a:lnR w="12240">
+                      <a:solidFill>
+                        <a:srgbClr val="FFFFFF"/>
+                      </a:solidFill>
+                    </a:lnR>
+                    <a:lnT w="12240">
+                      <a:solidFill>
+                        <a:srgbClr val="FFFFFF"/>
+                      </a:solidFill>
+                    </a:lnT>
+                    <a:lnB w="12240">
+                      <a:solidFill>
+                        <a:srgbClr val="FFFFFF"/>
+                      </a:solidFill>
+                    </a:lnB>
+                    <a:solidFill>
+                      <a:srgbClr val="E7EAEC"/>
+                    </a:solidFill>
+                  </a:tcPr>
+                </a:tc>
+                <a:tc>
+                  <a:txBody>
+                    <a:bodyPr/>
+                    <a:lstStyle/>
+                    <a:p>
+                      <a:pPr algn="ctr">
+                        <a:lnSpc>
+                          <a:spcPct val="100000"/>
+                        </a:lnSpc>
+                      </a:pPr>
+                      <a:r>
+                        <a:rPr lang="es-ES" sz="1200" b="0" strike="noStrike" spc="-1">
+                          <a:solidFill>
+                            <a:srgbClr val="000000"/>
+                          </a:solidFill>
+                          <a:latin typeface="Aptos"/>
+                          <a:ea typeface="DejaVu Sans"/>
+                        </a:rPr>
+                        <a:t>ENSP00000299766.3:p.Pro272His</a:t>
+                      </a:r>
                       <a:endParaRPr lang="es-ES" sz="1200" b="0" strike="noStrike" spc="-1">
+                        <a:latin typeface="Arial"/>
+                      </a:endParaRPr>
+                    </a:p>
+                  </a:txBody>
+                  <a:tcPr marL="7560" marR="7560">
+                    <a:lnL w="12240">
+                      <a:solidFill>
+                        <a:srgbClr val="FFFFFF"/>
+                      </a:solidFill>
+                    </a:lnL>
+                    <a:lnR w="12240">
+                      <a:solidFill>
+                        <a:srgbClr val="FFFFFF"/>
+                      </a:solidFill>
+                    </a:lnR>
+                    <a:lnT w="12240">
+                      <a:solidFill>
+                        <a:srgbClr val="FFFFFF"/>
+                      </a:solidFill>
+                    </a:lnT>
+                    <a:lnB w="12240">
+                      <a:solidFill>
+                        <a:srgbClr val="FFFFFF"/>
+                      </a:solidFill>
+                    </a:lnB>
+                    <a:solidFill>
+                      <a:srgbClr val="E7EAEC"/>
+                    </a:solidFill>
+                  </a:tcPr>
+                </a:tc>
+                <a:tc>
+                  <a:txBody>
+                    <a:bodyPr/>
+                    <a:lstStyle/>
+                    <a:p>
+                      <a:pPr algn="ctr">
+                        <a:lnSpc>
+                          <a:spcPct val="100000"/>
+                        </a:lnSpc>
+                      </a:pPr>
+                      <a:r>
+                        <a:rPr lang="es-ES" sz="1200" b="0" strike="noStrike" spc="-1">
+                          <a:solidFill>
+                            <a:srgbClr val="000000"/>
+                          </a:solidFill>
+                          <a:latin typeface="Aptos"/>
+                          <a:ea typeface="DejaVu Sans"/>
+                        </a:rPr>
+                        <a:t>Missense</a:t>
+                      </a:r>
+                      <a:endParaRPr lang="es-ES" sz="1200" b="0" strike="noStrike" spc="-1">
+                        <a:latin typeface="Arial"/>
+                      </a:endParaRPr>
+                    </a:p>
+                  </a:txBody>
+                  <a:tcPr marL="7560" marR="7560">
+                    <a:lnL w="12240">
+                      <a:solidFill>
+                        <a:srgbClr val="FFFFFF"/>
+                      </a:solidFill>
+                    </a:lnL>
+                    <a:lnR w="12240">
+                      <a:solidFill>
+                        <a:srgbClr val="FFFFFF"/>
+                      </a:solidFill>
+                    </a:lnR>
+                    <a:lnT w="12240">
+                      <a:solidFill>
+                        <a:srgbClr val="FFFFFF"/>
+                      </a:solidFill>
+                    </a:lnT>
+                    <a:lnB w="12240">
+                      <a:solidFill>
+                        <a:srgbClr val="FFFFFF"/>
+                      </a:solidFill>
+                    </a:lnB>
+                    <a:solidFill>
+                      <a:srgbClr val="E7EAEC"/>
+                    </a:solidFill>
+                  </a:tcPr>
+                </a:tc>
+                <a:tc>
+                  <a:txBody>
+                    <a:bodyPr/>
+                    <a:lstStyle/>
+                    <a:p>
+                      <a:pPr algn="ctr">
+                        <a:lnSpc>
+                          <a:spcPct val="100000"/>
+                        </a:lnSpc>
+                      </a:pPr>
+                      <a:r>
+                        <a:rPr lang="es-ES" sz="1200" b="0" strike="noStrike" spc="-1">
+                          <a:solidFill>
+                            <a:srgbClr val="000000"/>
+                          </a:solidFill>
+                          <a:latin typeface="Aptos"/>
+                          <a:ea typeface="DejaVu Sans"/>
+                        </a:rPr>
+                        <a:t>deleterious (0)</a:t>
+                      </a:r>
+                      <a:endParaRPr lang="es-ES" sz="1200" b="0" strike="noStrike" spc="-1">
+                        <a:latin typeface="Arial"/>
+                      </a:endParaRPr>
+                    </a:p>
+                  </a:txBody>
+                  <a:tcPr marL="7560" marR="7560">
+                    <a:lnL w="12240">
+                      <a:solidFill>
+                        <a:srgbClr val="FFFFFF"/>
+                      </a:solidFill>
+                    </a:lnL>
+                    <a:lnR w="12240">
+                      <a:solidFill>
+                        <a:srgbClr val="FFFFFF"/>
+                      </a:solidFill>
+                    </a:lnR>
+                    <a:lnT w="12240">
+                      <a:solidFill>
+                        <a:srgbClr val="FFFFFF"/>
+                      </a:solidFill>
+                    </a:lnT>
+                    <a:lnB w="12240">
+                      <a:solidFill>
+                        <a:srgbClr val="FFFFFF"/>
+                      </a:solidFill>
+                    </a:lnB>
+                    <a:solidFill>
+                      <a:srgbClr val="E7EAEC"/>
+                    </a:solidFill>
+                  </a:tcPr>
+                </a:tc>
+                <a:tc>
+                  <a:txBody>
+                    <a:bodyPr/>
+                    <a:lstStyle/>
+                    <a:p>
+                      <a:pPr algn="ctr">
+                        <a:lnSpc>
+                          <a:spcPct val="100000"/>
+                        </a:lnSpc>
+                      </a:pPr>
+                      <a:r>
+                        <a:rPr lang="es-ES" sz="1200" b="0" strike="noStrike" spc="-1">
+                          <a:solidFill>
+                            <a:srgbClr val="000000"/>
+                          </a:solidFill>
+                          <a:latin typeface="Aptos"/>
+                          <a:ea typeface="DejaVu Sans"/>
+                        </a:rPr>
+                        <a:t>probably damaging (1)</a:t>
+                      </a:r>
+                      <a:endParaRPr lang="es-ES" sz="1200" b="0" strike="noStrike" spc="-1">
+                        <a:latin typeface="Arial"/>
+                      </a:endParaRPr>
+                    </a:p>
+                  </a:txBody>
+                  <a:tcPr marL="7560" marR="7560">
+                    <a:lnL w="12240">
+                      <a:solidFill>
+                        <a:srgbClr val="FFFFFF"/>
+                      </a:solidFill>
+                    </a:lnL>
+                    <a:lnR w="12240">
+                      <a:solidFill>
+                        <a:srgbClr val="FFFFFF"/>
+                      </a:solidFill>
+                    </a:lnR>
+                    <a:lnT w="12240">
+                      <a:solidFill>
+                        <a:srgbClr val="FFFFFF"/>
+                      </a:solidFill>
+                    </a:lnT>
+                    <a:lnB w="12240">
+                      <a:solidFill>
+                        <a:srgbClr val="FFFFFF"/>
+                      </a:solidFill>
+                    </a:lnB>
+                    <a:solidFill>
+                      <a:srgbClr val="E7EAEC"/>
+                    </a:solidFill>
+                  </a:tcPr>
+                </a:tc>
+                <a:tc>
+                  <a:txBody>
+                    <a:bodyPr/>
+                    <a:lstStyle/>
+                    <a:p>
+                      <a:pPr algn="ctr">
+                        <a:lnSpc>
+                          <a:spcPct val="100000"/>
+                        </a:lnSpc>
+                      </a:pPr>
+                      <a:r>
+                        <a:rPr lang="es-ES" sz="1200" b="0" strike="noStrike" spc="-1" dirty="0">
+                          <a:solidFill>
+                            <a:srgbClr val="000000"/>
+                          </a:solidFill>
+                          <a:latin typeface="Aptos"/>
+                          <a:ea typeface="DejaVu Sans"/>
+                        </a:rPr>
+                        <a:t># 618406</a:t>
+                      </a:r>
+                      <a:endParaRPr lang="es-ES" sz="1200" b="0" strike="noStrike" spc="-1" dirty="0">
+                        <a:latin typeface="Arial"/>
+                      </a:endParaRPr>
+                    </a:p>
+                  </a:txBody>
+                  <a:tcPr marL="7560" marR="7560">
+                    <a:lnL w="12240">
+                      <a:solidFill>
+                        <a:srgbClr val="FFFFFF"/>
+                      </a:solidFill>
+                    </a:lnL>
+                    <a:lnR w="12240">
+                      <a:solidFill>
+                        <a:srgbClr val="FFFFFF"/>
+                      </a:solidFill>
+                    </a:lnR>
+                    <a:lnT w="12240">
+                      <a:solidFill>
+                        <a:srgbClr val="FFFFFF"/>
+                      </a:solidFill>
+                    </a:lnT>
+                    <a:lnB w="12240">
+                      <a:solidFill>
+                        <a:srgbClr val="FFFFFF"/>
+                      </a:solidFill>
+                    </a:lnB>
+                    <a:solidFill>
+                      <a:srgbClr val="E7EAEC"/>
+                    </a:solidFill>
+                  </a:tcPr>
+                </a:tc>
+                <a:tc>
+                  <a:txBody>
+                    <a:bodyPr/>
+                    <a:lstStyle/>
+                    <a:p>
+                      <a:pPr algn="ctr">
+                        <a:lnSpc>
+                          <a:spcPct val="100000"/>
+                        </a:lnSpc>
+                        <a:tabLst>
+                          <a:tab pos="0" algn="l"/>
+                        </a:tabLst>
+                      </a:pPr>
+                      <a:r>
+                        <a:rPr lang="es-ES" sz="1200" b="0" strike="noStrike" spc="-1" dirty="0">
+                          <a:solidFill>
+                            <a:srgbClr val="000000"/>
+                          </a:solidFill>
+                          <a:latin typeface="Aptos"/>
+                          <a:ea typeface="DejaVu Sans"/>
+                        </a:rPr>
+                        <a:t>Autosómico recesiva/</a:t>
+                      </a:r>
+                    </a:p>
+                    <a:p>
+                      <a:pPr algn="ctr">
+                        <a:lnSpc>
+                          <a:spcPct val="100000"/>
+                        </a:lnSpc>
+                        <a:tabLst>
+                          <a:tab pos="0" algn="l"/>
+                        </a:tabLst>
+                      </a:pPr>
+                      <a:r>
+                        <a:rPr lang="es-ES" sz="1200" b="0" strike="noStrike" spc="-1" dirty="0">
+                          <a:solidFill>
+                            <a:srgbClr val="000000"/>
+                          </a:solidFill>
+                          <a:latin typeface="Aptos"/>
+                        </a:rPr>
+                        <a:t>Autosómico Dominante</a:t>
+                      </a:r>
+                      <a:endParaRPr lang="es-ES" sz="1200" b="0" strike="noStrike" spc="-1" dirty="0">
+                        <a:latin typeface="Arial"/>
+                      </a:endParaRPr>
+                    </a:p>
+                    <a:p>
+                      <a:pPr algn="ctr">
+                        <a:lnSpc>
+                          <a:spcPct val="100000"/>
+                        </a:lnSpc>
+                        <a:tabLst>
+                          <a:tab pos="0" algn="l"/>
+                        </a:tabLst>
+                      </a:pPr>
+                      <a:endParaRPr lang="es-ES" sz="1200" b="0" strike="noStrike" spc="-1" dirty="0">
+                        <a:latin typeface="Arial"/>
+                      </a:endParaRPr>
+                    </a:p>
+                  </a:txBody>
+                  <a:tcPr marL="7560" marR="7560">
+                    <a:lnL w="12240">
+                      <a:solidFill>
+                        <a:srgbClr val="FFFFFF"/>
+                      </a:solidFill>
+                    </a:lnL>
+                    <a:lnR w="12240">
+                      <a:solidFill>
+                        <a:srgbClr val="FFFFFF"/>
+                      </a:solidFill>
+                    </a:lnR>
+                    <a:lnT w="12240">
+                      <a:solidFill>
+                        <a:srgbClr val="FFFFFF"/>
+                      </a:solidFill>
+                    </a:lnT>
+                    <a:lnB w="12240">
+                      <a:solidFill>
+                        <a:srgbClr val="FFFFFF"/>
+                      </a:solidFill>
+                    </a:lnB>
+                    <a:solidFill>
+                      <a:srgbClr val="E7EAEC"/>
+                    </a:solidFill>
+                  </a:tcPr>
+                </a:tc>
+                <a:tc>
+                  <a:txBody>
+                    <a:bodyPr/>
+                    <a:lstStyle/>
+                    <a:p>
+                      <a:pPr algn="ctr">
+                        <a:lnSpc>
+                          <a:spcPct val="100000"/>
+                        </a:lnSpc>
+                      </a:pPr>
+                      <a:r>
+                        <a:rPr lang="es-ES" sz="1200" b="0" strike="noStrike" spc="-1">
+                          <a:solidFill>
+                            <a:srgbClr val="000000"/>
+                          </a:solidFill>
+                          <a:latin typeface="Aptos"/>
+                          <a:ea typeface="DejaVu Sans"/>
+                        </a:rPr>
+                        <a:t>Vía de señalización de la saciedad </a:t>
+                      </a:r>
+                      <a:endParaRPr lang="es-ES" sz="1200" b="0" strike="noStrike" spc="-1">
+                        <a:latin typeface="Arial"/>
+                      </a:endParaRPr>
+                    </a:p>
+                  </a:txBody>
+                  <a:tcPr marL="7560" marR="7560">
+                    <a:lnL w="12240">
+                      <a:solidFill>
+                        <a:srgbClr val="FFFFFF"/>
+                      </a:solidFill>
+                    </a:lnL>
+                    <a:lnR w="12240">
+                      <a:solidFill>
+                        <a:srgbClr val="FFFFFF"/>
+                      </a:solidFill>
+                    </a:lnR>
+                    <a:lnT w="12240">
+                      <a:solidFill>
+                        <a:srgbClr val="FFFFFF"/>
+                      </a:solidFill>
+                    </a:lnT>
+                    <a:lnB w="12240">
+                      <a:solidFill>
+                        <a:srgbClr val="FFFFFF"/>
+                      </a:solidFill>
+                    </a:lnB>
+                    <a:solidFill>
+                      <a:srgbClr val="E7EAEC"/>
+                    </a:solidFill>
+                  </a:tcPr>
+                </a:tc>
+                <a:extLst>
+                  <a:ext uri="{0D108BD9-81ED-4DB2-BD59-A6C34878D82A}">
+                    <a16:rowId xmlns:a16="http://schemas.microsoft.com/office/drawing/2014/main" val="10002"/>
+                  </a:ext>
+                </a:extLst>
+              </a:tr>
+              <a:tr h="324000">
+                <a:tc>
+                  <a:txBody>
+                    <a:bodyPr/>
+                    <a:lstStyle/>
+                    <a:p>
+                      <a:pPr>
+                        <a:lnSpc>
+                          <a:spcPct val="100000"/>
+                        </a:lnSpc>
+                      </a:pPr>
+                      <a:r>
+                        <a:rPr lang="es-ES" sz="1200" b="0" strike="noStrike" spc="-1">
+                          <a:solidFill>
+                            <a:srgbClr val="000000"/>
+                          </a:solidFill>
+                          <a:latin typeface="Aptos"/>
+                          <a:ea typeface="DejaVu Sans"/>
+                        </a:rPr>
+                        <a:t>MED12</a:t>
+                      </a:r>
+                      <a:endParaRPr lang="es-ES" sz="1200" b="0" strike="noStrike" spc="-1">
+                        <a:latin typeface="Arial"/>
+                      </a:endParaRPr>
+                    </a:p>
+                  </a:txBody>
+                  <a:tcPr marL="7560" marR="7560">
+                    <a:lnL w="12240">
+                      <a:solidFill>
+                        <a:srgbClr val="FFFFFF"/>
+                      </a:solidFill>
+                    </a:lnL>
+                    <a:lnR w="12240">
+                      <a:solidFill>
+                        <a:srgbClr val="FFFFFF"/>
+                      </a:solidFill>
+                    </a:lnR>
+                    <a:lnT w="12240">
+                      <a:solidFill>
+                        <a:srgbClr val="FFFFFF"/>
+                      </a:solidFill>
+                    </a:lnT>
+                    <a:lnB w="12240">
+                      <a:solidFill>
+                        <a:srgbClr val="FFFFFF"/>
+                      </a:solidFill>
+                    </a:lnB>
+                    <a:solidFill>
+                      <a:srgbClr val="E7EAEC"/>
+                    </a:solidFill>
+                  </a:tcPr>
+                </a:tc>
+                <a:tc>
+                  <a:txBody>
+                    <a:bodyPr/>
+                    <a:lstStyle/>
+                    <a:p>
+                      <a:pPr algn="ctr">
+                        <a:lnSpc>
+                          <a:spcPct val="100000"/>
+                        </a:lnSpc>
+                      </a:pPr>
+                      <a:r>
+                        <a:rPr lang="es-ES" sz="1200" b="0" strike="noStrike" spc="-1" dirty="0">
+                          <a:solidFill>
+                            <a:srgbClr val="000000"/>
+                          </a:solidFill>
+                          <a:latin typeface="Aptos"/>
+                          <a:ea typeface="DejaVu Sans"/>
+                        </a:rPr>
+                        <a:t>X:71121046</a:t>
+                      </a:r>
+                      <a:endParaRPr lang="es-ES" sz="1200" b="0" strike="noStrike" spc="-1" dirty="0">
+                        <a:latin typeface="Arial"/>
+                      </a:endParaRPr>
+                    </a:p>
+                  </a:txBody>
+                  <a:tcPr marL="7560" marR="7560">
+                    <a:lnL w="12240">
+                      <a:solidFill>
+                        <a:srgbClr val="FFFFFF"/>
+                      </a:solidFill>
+                    </a:lnL>
+                    <a:lnR w="12240">
+                      <a:solidFill>
+                        <a:srgbClr val="FFFFFF"/>
+                      </a:solidFill>
+                    </a:lnR>
+                    <a:lnT w="12240">
+                      <a:solidFill>
+                        <a:srgbClr val="FFFFFF"/>
+                      </a:solidFill>
+                    </a:lnT>
+                    <a:lnB w="12240">
+                      <a:solidFill>
+                        <a:srgbClr val="FFFFFF"/>
+                      </a:solidFill>
+                    </a:lnB>
+                    <a:solidFill>
+                      <a:srgbClr val="E7EAEC"/>
+                    </a:solidFill>
+                  </a:tcPr>
+                </a:tc>
+                <a:tc>
+                  <a:txBody>
+                    <a:bodyPr/>
+                    <a:lstStyle/>
+                    <a:p>
+                      <a:pPr algn="ctr">
+                        <a:lnSpc>
+                          <a:spcPct val="100000"/>
+                        </a:lnSpc>
+                      </a:pPr>
+                      <a:r>
+                        <a:rPr lang="es-ES" sz="1200" b="0" strike="noStrike" spc="-1" dirty="0">
+                          <a:solidFill>
+                            <a:srgbClr val="000000"/>
+                          </a:solidFill>
+                          <a:latin typeface="Aptos"/>
+                          <a:ea typeface="DejaVu Sans"/>
+                        </a:rPr>
+                        <a:t>ENST00000374080.8:c.629C&gt;T</a:t>
+                      </a:r>
+                      <a:endParaRPr lang="es-ES" sz="1200" b="0" strike="noStrike" spc="-1" dirty="0">
                         <a:latin typeface="Arial"/>
                       </a:endParaRPr>
                     </a:p>
@@ -6297,7 +7005,7 @@
                           <a:latin typeface="Aptos"/>
                           <a:ea typeface="DejaVu Sans"/>
                         </a:rPr>
-                        <a:t>heterocigoto</a:t>
+                        <a:t>hemicigoto</a:t>
                       </a:r>
                       <a:endParaRPr lang="es-ES" sz="1200" b="0" strike="noStrike" spc="-1">
                         <a:latin typeface="Arial"/>
@@ -6348,12 +7056,43 @@
                           <a:latin typeface="Aptos"/>
                           <a:ea typeface="DejaVu Sans"/>
                         </a:rPr>
-                        <a:t>6.195x10-7</a:t>
+                        <a:t>4.553x10-6 (mutación)</a:t>
                       </a:r>
                       <a:endParaRPr lang="es-ES" sz="1200" b="0" strike="noStrike" spc="-1">
                         <a:latin typeface="Arial"/>
                       </a:endParaRPr>
                     </a:p>
+                  </a:txBody>
+                  <a:tcPr marL="7560" marR="7560">
+                    <a:lnL w="12240">
+                      <a:solidFill>
+                        <a:srgbClr val="FFFFFF"/>
+                      </a:solidFill>
+                    </a:lnL>
+                    <a:lnR w="12240">
+                      <a:solidFill>
+                        <a:srgbClr val="FFFFFF"/>
+                      </a:solidFill>
+                    </a:lnR>
+                    <a:lnT w="12240">
+                      <a:solidFill>
+                        <a:srgbClr val="FFFFFF"/>
+                      </a:solidFill>
+                    </a:lnT>
+                    <a:lnB w="12240">
+                      <a:solidFill>
+                        <a:srgbClr val="FFFFFF"/>
+                      </a:solidFill>
+                    </a:lnB>
+                    <a:solidFill>
+                      <a:srgbClr val="E7EAEC"/>
+                    </a:solidFill>
+                  </a:tcPr>
+                </a:tc>
+                <a:tc>
+                  <a:txBody>
+                    <a:bodyPr/>
+                    <a:lstStyle/>
                     <a:p>
                       <a:pPr algn="ctr">
                         <a:lnSpc>
@@ -6361,16 +7100,118 @@
                         </a:lnSpc>
                       </a:pPr>
                       <a:r>
-                        <a:rPr lang="es-ES" sz="1200" b="0" strike="noStrike" spc="-1">
+                        <a:rPr lang="es-ES" sz="1200" b="0" strike="noStrike" spc="-1" dirty="0">
                           <a:solidFill>
                             <a:srgbClr val="000000"/>
                           </a:solidFill>
                           <a:latin typeface="Aptos"/>
                           <a:ea typeface="DejaVu Sans"/>
                         </a:rPr>
-                        <a:t>(mutación)</a:t>
+                        <a:t>ENST00000374080.8</a:t>
                       </a:r>
-                      <a:endParaRPr lang="es-ES" sz="1200" b="0" strike="noStrike" spc="-1">
+                      <a:endParaRPr lang="es-ES" sz="1200" b="0" strike="noStrike" spc="-1" dirty="0">
+                        <a:latin typeface="Arial"/>
+                      </a:endParaRPr>
+                    </a:p>
+                  </a:txBody>
+                  <a:tcPr marL="7560" marR="7560">
+                    <a:lnL w="12240">
+                      <a:solidFill>
+                        <a:srgbClr val="FFFFFF"/>
+                      </a:solidFill>
+                    </a:lnL>
+                    <a:lnR w="12240">
+                      <a:solidFill>
+                        <a:srgbClr val="FFFFFF"/>
+                      </a:solidFill>
+                    </a:lnR>
+                    <a:lnT w="12240">
+                      <a:solidFill>
+                        <a:srgbClr val="FFFFFF"/>
+                      </a:solidFill>
+                    </a:lnT>
+                    <a:lnB w="12240">
+                      <a:solidFill>
+                        <a:srgbClr val="FFFFFF"/>
+                      </a:solidFill>
+                    </a:lnB>
+                    <a:solidFill>
+                      <a:srgbClr val="E7EAEC"/>
+                    </a:solidFill>
+                  </a:tcPr>
+                </a:tc>
+                <a:tc>
+                  <a:txBody>
+                    <a:bodyPr/>
+                    <a:lstStyle/>
+                    <a:p>
+                      <a:pPr algn="ctr">
+                        <a:lnSpc>
+                          <a:spcPct val="100000"/>
+                        </a:lnSpc>
+                      </a:pPr>
+                      <a:r>
+                        <a:rPr lang="es-ES" sz="1200" b="0" strike="noStrike" spc="-1" dirty="0">
+                          <a:solidFill>
+                            <a:srgbClr val="000000"/>
+                          </a:solidFill>
+                          <a:latin typeface="Aptos"/>
+                          <a:ea typeface="DejaVu Sans"/>
+                        </a:rPr>
+                        <a:t>ENSP00000363193.3:p.Ala210Val</a:t>
+                      </a:r>
+                      <a:endParaRPr lang="es-ES" sz="1200" b="0" strike="noStrike" spc="-1" dirty="0">
+                        <a:latin typeface="Arial"/>
+                      </a:endParaRPr>
+                    </a:p>
+                  </a:txBody>
+                  <a:tcPr marL="7560" marR="7560">
+                    <a:lnL w="12240">
+                      <a:solidFill>
+                        <a:srgbClr val="FFFFFF"/>
+                      </a:solidFill>
+                    </a:lnL>
+                    <a:lnR w="12240">
+                      <a:solidFill>
+                        <a:srgbClr val="FFFFFF"/>
+                      </a:solidFill>
+                    </a:lnR>
+                    <a:lnT w="12240">
+                      <a:solidFill>
+                        <a:srgbClr val="FFFFFF"/>
+                      </a:solidFill>
+                    </a:lnT>
+                    <a:lnB w="12240">
+                      <a:solidFill>
+                        <a:srgbClr val="FFFFFF"/>
+                      </a:solidFill>
+                    </a:lnB>
+                    <a:solidFill>
+                      <a:srgbClr val="E7EAEC"/>
+                    </a:solidFill>
+                  </a:tcPr>
+                </a:tc>
+                <a:tc>
+                  <a:txBody>
+                    <a:bodyPr/>
+                    <a:lstStyle/>
+                    <a:p>
+                      <a:pPr algn="ctr">
+                        <a:lnSpc>
+                          <a:spcPct val="100000"/>
+                        </a:lnSpc>
+                      </a:pPr>
+                      <a:r>
+                        <a:rPr lang="es-ES" sz="1200" b="0" strike="noStrike" spc="-1" dirty="0" err="1">
+                          <a:solidFill>
+                            <a:srgbClr val="000000"/>
+                          </a:solidFill>
+                          <a:latin typeface="Aptos"/>
+                          <a:ea typeface="DejaVu Sans"/>
+                        </a:rPr>
+                        <a:t>Missense</a:t>
+                      </a:r>
+                      <a:endParaRPr lang="es-ES" sz="1200" b="0" strike="noStrike" spc="-1" dirty="0">
                         <a:latin typeface="Arial"/>
                       </a:endParaRPr>
                     </a:p>
@@ -6419,7 +7260,7 @@
                           <a:latin typeface="Aptos"/>
                           <a:ea typeface="DejaVu Sans"/>
                         </a:rPr>
-                        <a:t>ENST00000299766.5</a:t>
+                        <a:t>deleterious low confidence (0.02)</a:t>
                       </a:r>
                       <a:endParaRPr lang="es-ES" sz="1200" b="0" strike="noStrike" spc="-1">
                         <a:latin typeface="Arial"/>
@@ -6470,11 +7311,110 @@
                           <a:latin typeface="Aptos"/>
                           <a:ea typeface="DejaVu Sans"/>
                         </a:rPr>
-                        <a:t>ENSP00000299766.3:p.Pro272His</a:t>
+                        <a:t>benign (0.19)</a:t>
                       </a:r>
                       <a:endParaRPr lang="es-ES" sz="1200" b="0" strike="noStrike" spc="-1">
                         <a:latin typeface="Arial"/>
                       </a:endParaRPr>
+                    </a:p>
+                  </a:txBody>
+                  <a:tcPr marL="7560" marR="7560">
+                    <a:lnL w="12240">
+                      <a:solidFill>
+                        <a:srgbClr val="FFFFFF"/>
+                      </a:solidFill>
+                    </a:lnL>
+                    <a:lnR w="12240">
+                      <a:solidFill>
+                        <a:srgbClr val="FFFFFF"/>
+                      </a:solidFill>
+                    </a:lnR>
+                    <a:lnT w="12240">
+                      <a:solidFill>
+                        <a:srgbClr val="FFFFFF"/>
+                      </a:solidFill>
+                    </a:lnT>
+                    <a:lnB w="12240">
+                      <a:solidFill>
+                        <a:srgbClr val="FFFFFF"/>
+                      </a:solidFill>
+                    </a:lnB>
+                    <a:solidFill>
+                      <a:srgbClr val="E7EAEC"/>
+                    </a:solidFill>
+                  </a:tcPr>
+                </a:tc>
+                <a:tc>
+                  <a:txBody>
+                    <a:bodyPr/>
+                    <a:lstStyle/>
+                    <a:p>
+                      <a:pPr algn="ctr">
+                        <a:lnSpc>
+                          <a:spcPct val="100000"/>
+                        </a:lnSpc>
+                      </a:pPr>
+                      <a:r>
+                        <a:rPr lang="es-ES" sz="1200" b="0" strike="noStrike" spc="-1" dirty="0">
+                          <a:solidFill>
+                            <a:srgbClr val="000000"/>
+                          </a:solidFill>
+                          <a:latin typeface="Aptos"/>
+                          <a:ea typeface="+mn-ea"/>
+                        </a:rPr>
+                        <a:t># 305450</a:t>
+                      </a:r>
+                      <a:endParaRPr lang="es-ES" sz="1200" b="0" strike="noStrike" spc="-1" dirty="0">
+                        <a:latin typeface="Arial"/>
+                      </a:endParaRPr>
+                    </a:p>
+                  </a:txBody>
+                  <a:tcPr marL="7560" marR="7560">
+                    <a:lnL w="12240">
+                      <a:solidFill>
+                        <a:srgbClr val="FFFFFF"/>
+                      </a:solidFill>
+                    </a:lnL>
+                    <a:lnR w="12240">
+                      <a:solidFill>
+                        <a:srgbClr val="FFFFFF"/>
+                      </a:solidFill>
+                    </a:lnR>
+                    <a:lnT w="12240">
+                      <a:solidFill>
+                        <a:srgbClr val="FFFFFF"/>
+                      </a:solidFill>
+                    </a:lnT>
+                    <a:lnB w="12240">
+                      <a:solidFill>
+                        <a:srgbClr val="FFFFFF"/>
+                      </a:solidFill>
+                    </a:lnB>
+                    <a:solidFill>
+                      <a:srgbClr val="E7EAEC"/>
+                    </a:solidFill>
+                  </a:tcPr>
+                </a:tc>
+                <a:tc>
+                  <a:txBody>
+                    <a:bodyPr/>
+                    <a:lstStyle/>
+                    <a:p>
+                      <a:pPr algn="ctr">
+                        <a:lnSpc>
+                          <a:spcPct val="100000"/>
+                        </a:lnSpc>
+                      </a:pPr>
+                      <a:r>
+                        <a:rPr lang="es-ES" sz="1200" b="0" strike="noStrike" spc="-1" dirty="0">
+                          <a:solidFill>
+                            <a:srgbClr val="000000"/>
+                          </a:solidFill>
+                          <a:latin typeface="Aptos"/>
+                          <a:ea typeface="DejaVu Sans"/>
+                        </a:rPr>
+                        <a:t>Ligada al X recesiva</a:t>
+                      </a:r>
                     </a:p>
                   </a:txBody>
                   <a:tcPr marL="7560" marR="7560">
@@ -6521,7 +7461,65 @@
                           <a:latin typeface="Aptos"/>
                           <a:ea typeface="DejaVu Sans"/>
                         </a:rPr>
-                        <a:t>Missense</a:t>
+                        <a:t>Vía de señalización de la hormona tiroidea</a:t>
+                      </a:r>
+                      <a:endParaRPr lang="es-ES" sz="1200" b="0" strike="noStrike" spc="-1">
+                        <a:latin typeface="Arial"/>
+                      </a:endParaRPr>
+                    </a:p>
+                  </a:txBody>
+                  <a:tcPr marL="7560" marR="7560">
+                    <a:lnL w="12240">
+                      <a:solidFill>
+                        <a:srgbClr val="FFFFFF"/>
+                      </a:solidFill>
+                    </a:lnL>
+                    <a:lnR w="12240">
+                      <a:solidFill>
+                        <a:srgbClr val="FFFFFF"/>
+                      </a:solidFill>
+                    </a:lnR>
+                    <a:lnT w="12240">
+                      <a:solidFill>
+                        <a:srgbClr val="FFFFFF"/>
+                      </a:solidFill>
+                    </a:lnT>
+                    <a:lnB w="12240">
+                      <a:solidFill>
+                        <a:srgbClr val="FFFFFF"/>
+                      </a:solidFill>
+                    </a:lnB>
+                    <a:solidFill>
+                      <a:srgbClr val="E7EAEC"/>
+                    </a:solidFill>
+                  </a:tcPr>
+                </a:tc>
+                <a:extLst>
+                  <a:ext uri="{0D108BD9-81ED-4DB2-BD59-A6C34878D82A}">
+                    <a16:rowId xmlns:a16="http://schemas.microsoft.com/office/drawing/2014/main" val="10003"/>
+                  </a:ext>
+                </a:extLst>
+              </a:tr>
+              <a:tr h="324000">
+                <a:tc>
+                  <a:txBody>
+                    <a:bodyPr/>
+                    <a:lstStyle/>
+                    <a:p>
+                      <a:pPr>
+                        <a:lnSpc>
+                          <a:spcPct val="100000"/>
+                        </a:lnSpc>
+                      </a:pPr>
+                      <a:r>
+                        <a:rPr lang="es-ES" sz="1200" b="0" strike="noStrike" spc="-1">
+                          <a:solidFill>
+                            <a:srgbClr val="000000"/>
+                          </a:solidFill>
+                          <a:latin typeface="Aptos"/>
+                          <a:ea typeface="DejaVu Sans"/>
+                        </a:rPr>
+                        <a:t>TP53</a:t>
                       </a:r>
                       <a:endParaRPr lang="es-ES" sz="1200" b="0" strike="noStrike" spc="-1">
                         <a:latin typeface="Arial"/>
@@ -6572,7 +7570,7 @@
                           <a:latin typeface="Aptos"/>
                           <a:ea typeface="DejaVu Sans"/>
                         </a:rPr>
-                        <a:t>deleterious (0)</a:t>
+                        <a:t>17:7676154</a:t>
                       </a:r>
                       <a:endParaRPr lang="es-ES" sz="1200" b="0" strike="noStrike" spc="-1">
                         <a:latin typeface="Arial"/>
@@ -6623,338 +7621,9 @@
                           <a:latin typeface="Aptos"/>
                           <a:ea typeface="DejaVu Sans"/>
                         </a:rPr>
-                        <a:t>probably damaging (1)</a:t>
+                        <a:t>ENST00000269305.9:c.215C&gt;T</a:t>
                       </a:r>
                       <a:endParaRPr lang="es-ES" sz="1200" b="0" strike="noStrike" spc="-1">
-                        <a:latin typeface="Arial"/>
-                      </a:endParaRPr>
-                    </a:p>
-                  </a:txBody>
-                  <a:tcPr marL="7560" marR="7560">
-                    <a:lnL w="12240">
-                      <a:solidFill>
-                        <a:srgbClr val="FFFFFF"/>
-                      </a:solidFill>
-                    </a:lnL>
-                    <a:lnR w="12240">
-                      <a:solidFill>
-                        <a:srgbClr val="FFFFFF"/>
-                      </a:solidFill>
-                    </a:lnR>
-                    <a:lnT w="12240">
-                      <a:solidFill>
-                        <a:srgbClr val="FFFFFF"/>
-                      </a:solidFill>
-                    </a:lnT>
-                    <a:lnB w="12240">
-                      <a:solidFill>
-                        <a:srgbClr val="FFFFFF"/>
-                      </a:solidFill>
-                    </a:lnB>
-                    <a:solidFill>
-                      <a:srgbClr val="E7EAEC"/>
-                    </a:solidFill>
-                  </a:tcPr>
-                </a:tc>
-                <a:tc>
-                  <a:txBody>
-                    <a:bodyPr/>
-                    <a:lstStyle/>
-                    <a:p>
-                      <a:pPr algn="ctr">
-                        <a:lnSpc>
-                          <a:spcPct val="100000"/>
-                        </a:lnSpc>
-                      </a:pPr>
-                      <a:r>
-                        <a:rPr lang="es-ES" sz="1200" b="0" strike="noStrike" spc="-1" dirty="0" smtClean="0">
-                          <a:solidFill>
-                            <a:srgbClr val="000000"/>
-                          </a:solidFill>
-                          <a:latin typeface="Aptos"/>
-                          <a:ea typeface="DejaVu Sans"/>
-                        </a:rPr>
-                        <a:t># 618406</a:t>
-                      </a:r>
-                      <a:endParaRPr lang="es-ES" sz="1200" b="0" strike="noStrike" spc="-1" dirty="0">
-                        <a:latin typeface="Arial"/>
-                      </a:endParaRPr>
-                    </a:p>
-                  </a:txBody>
-                  <a:tcPr marL="7560" marR="7560">
-                    <a:lnL w="12240">
-                      <a:solidFill>
-                        <a:srgbClr val="FFFFFF"/>
-                      </a:solidFill>
-                    </a:lnL>
-                    <a:lnR w="12240">
-                      <a:solidFill>
-                        <a:srgbClr val="FFFFFF"/>
-                      </a:solidFill>
-                    </a:lnR>
-                    <a:lnT w="12240">
-                      <a:solidFill>
-                        <a:srgbClr val="FFFFFF"/>
-                      </a:solidFill>
-                    </a:lnT>
-                    <a:lnB w="12240">
-                      <a:solidFill>
-                        <a:srgbClr val="FFFFFF"/>
-                      </a:solidFill>
-                    </a:lnB>
-                    <a:solidFill>
-                      <a:srgbClr val="E7EAEC"/>
-                    </a:solidFill>
-                  </a:tcPr>
-                </a:tc>
-                <a:tc>
-                  <a:txBody>
-                    <a:bodyPr/>
-                    <a:lstStyle/>
-                    <a:p>
-                      <a:pPr algn="ctr">
-                        <a:lnSpc>
-                          <a:spcPct val="100000"/>
-                        </a:lnSpc>
-                        <a:tabLst>
-                          <a:tab pos="0" algn="l"/>
-                        </a:tabLst>
-                      </a:pPr>
-                      <a:r>
-                        <a:rPr lang="es-ES" sz="1200" b="0" strike="noStrike" spc="-1" dirty="0">
-                          <a:solidFill>
-                            <a:srgbClr val="000000"/>
-                          </a:solidFill>
-                          <a:latin typeface="Aptos"/>
-                          <a:ea typeface="DejaVu Sans"/>
-                        </a:rPr>
-                        <a:t>Autosómico recesiva</a:t>
-                      </a:r>
-                      <a:endParaRPr lang="es-ES" sz="1200" b="0" strike="noStrike" spc="-1" dirty="0">
-                        <a:latin typeface="Arial"/>
-                      </a:endParaRPr>
-                    </a:p>
-                    <a:p>
-                      <a:pPr algn="ctr">
-                        <a:lnSpc>
-                          <a:spcPct val="100000"/>
-                        </a:lnSpc>
-                        <a:tabLst>
-                          <a:tab pos="0" algn="l"/>
-                        </a:tabLst>
-                      </a:pPr>
-                      <a:endParaRPr lang="es-ES" sz="1200" b="0" strike="noStrike" spc="-1" dirty="0">
-                        <a:latin typeface="Arial"/>
-                      </a:endParaRPr>
-                    </a:p>
-                  </a:txBody>
-                  <a:tcPr marL="7560" marR="7560">
-                    <a:lnL w="12240">
-                      <a:solidFill>
-                        <a:srgbClr val="FFFFFF"/>
-                      </a:solidFill>
-                    </a:lnL>
-                    <a:lnR w="12240">
-                      <a:solidFill>
-                        <a:srgbClr val="FFFFFF"/>
-                      </a:solidFill>
-                    </a:lnR>
-                    <a:lnT w="12240">
-                      <a:solidFill>
-                        <a:srgbClr val="FFFFFF"/>
-                      </a:solidFill>
-                    </a:lnT>
-                    <a:lnB w="12240">
-                      <a:solidFill>
-                        <a:srgbClr val="FFFFFF"/>
-                      </a:solidFill>
-                    </a:lnB>
-                    <a:solidFill>
-                      <a:srgbClr val="E7EAEC"/>
-                    </a:solidFill>
-                  </a:tcPr>
-                </a:tc>
-                <a:tc>
-                  <a:txBody>
-                    <a:bodyPr/>
-                    <a:lstStyle/>
-                    <a:p>
-                      <a:pPr algn="ctr">
-                        <a:lnSpc>
-                          <a:spcPct val="100000"/>
-                        </a:lnSpc>
-                      </a:pPr>
-                      <a:r>
-                        <a:rPr lang="es-ES" sz="1200" b="0" strike="noStrike" spc="-1">
-                          <a:solidFill>
-                            <a:srgbClr val="000000"/>
-                          </a:solidFill>
-                          <a:latin typeface="Aptos"/>
-                          <a:ea typeface="DejaVu Sans"/>
-                        </a:rPr>
-                        <a:t>Vía de señalización de la saciedad </a:t>
-                      </a:r>
-                      <a:endParaRPr lang="es-ES" sz="1200" b="0" strike="noStrike" spc="-1">
-                        <a:latin typeface="Arial"/>
-                      </a:endParaRPr>
-                    </a:p>
-                  </a:txBody>
-                  <a:tcPr marL="7560" marR="7560">
-                    <a:lnL w="12240">
-                      <a:solidFill>
-                        <a:srgbClr val="FFFFFF"/>
-                      </a:solidFill>
-                    </a:lnL>
-                    <a:lnR w="12240">
-                      <a:solidFill>
-                        <a:srgbClr val="FFFFFF"/>
-                      </a:solidFill>
-                    </a:lnR>
-                    <a:lnT w="12240">
-                      <a:solidFill>
-                        <a:srgbClr val="FFFFFF"/>
-                      </a:solidFill>
-                    </a:lnT>
-                    <a:lnB w="12240">
-                      <a:solidFill>
-                        <a:srgbClr val="FFFFFF"/>
-                      </a:solidFill>
-                    </a:lnB>
-                    <a:solidFill>
-                      <a:srgbClr val="E7EAEC"/>
-                    </a:solidFill>
-                  </a:tcPr>
-                </a:tc>
-                <a:extLst>
-                  <a:ext uri="{0D108BD9-81ED-4DB2-BD59-A6C34878D82A}">
-                    <a16:rowId xmlns:a16="http://schemas.microsoft.com/office/drawing/2014/main" val="10002"/>
-                  </a:ext>
-                </a:extLst>
-              </a:tr>
-              <a:tr h="774360">
-                <a:tc>
-                  <a:txBody>
-                    <a:bodyPr/>
-                    <a:lstStyle/>
-                    <a:p>
-                      <a:pPr>
-                        <a:lnSpc>
-                          <a:spcPct val="100000"/>
-                        </a:lnSpc>
-                      </a:pPr>
-                      <a:r>
-                        <a:rPr lang="es-ES" sz="1200" b="0" strike="noStrike" spc="-1">
-                          <a:solidFill>
-                            <a:srgbClr val="000000"/>
-                          </a:solidFill>
-                          <a:latin typeface="Aptos"/>
-                          <a:ea typeface="DejaVu Sans"/>
-                        </a:rPr>
-                        <a:t>MED12</a:t>
-                      </a:r>
-                      <a:endParaRPr lang="es-ES" sz="1200" b="0" strike="noStrike" spc="-1">
-                        <a:latin typeface="Arial"/>
-                      </a:endParaRPr>
-                    </a:p>
-                  </a:txBody>
-                  <a:tcPr marL="7560" marR="7560">
-                    <a:lnL w="12240">
-                      <a:solidFill>
-                        <a:srgbClr val="FFFFFF"/>
-                      </a:solidFill>
-                    </a:lnL>
-                    <a:lnR w="12240">
-                      <a:solidFill>
-                        <a:srgbClr val="FFFFFF"/>
-                      </a:solidFill>
-                    </a:lnR>
-                    <a:lnT w="12240">
-                      <a:solidFill>
-                        <a:srgbClr val="FFFFFF"/>
-                      </a:solidFill>
-                    </a:lnT>
-                    <a:lnB w="12240">
-                      <a:solidFill>
-                        <a:srgbClr val="FFFFFF"/>
-                      </a:solidFill>
-                    </a:lnB>
-                    <a:solidFill>
-                      <a:srgbClr val="E7EAEC"/>
-                    </a:solidFill>
-                  </a:tcPr>
-                </a:tc>
-                <a:tc>
-                  <a:txBody>
-                    <a:bodyPr/>
-                    <a:lstStyle/>
-                    <a:p>
-                      <a:pPr algn="ctr">
-                        <a:lnSpc>
-                          <a:spcPct val="100000"/>
-                        </a:lnSpc>
-                      </a:pPr>
-                      <a:r>
-                        <a:rPr lang="es-ES" sz="1200" b="0" strike="noStrike" spc="-1" dirty="0">
-                          <a:solidFill>
-                            <a:srgbClr val="000000"/>
-                          </a:solidFill>
-                          <a:latin typeface="Aptos"/>
-                          <a:ea typeface="DejaVu Sans"/>
-                        </a:rPr>
-                        <a:t>X:71121046</a:t>
-                      </a:r>
-                      <a:endParaRPr lang="es-ES" sz="1200" b="0" strike="noStrike" spc="-1" dirty="0">
-                        <a:latin typeface="Arial"/>
-                      </a:endParaRPr>
-                    </a:p>
-                  </a:txBody>
-                  <a:tcPr marL="7560" marR="7560">
-                    <a:lnL w="12240">
-                      <a:solidFill>
-                        <a:srgbClr val="FFFFFF"/>
-                      </a:solidFill>
-                    </a:lnL>
-                    <a:lnR w="12240">
-                      <a:solidFill>
-                        <a:srgbClr val="FFFFFF"/>
-                      </a:solidFill>
-                    </a:lnR>
-                    <a:lnT w="12240">
-                      <a:solidFill>
-                        <a:srgbClr val="FFFFFF"/>
-                      </a:solidFill>
-                    </a:lnT>
-                    <a:lnB w="12240">
-                      <a:solidFill>
-                        <a:srgbClr val="FFFFFF"/>
-                      </a:solidFill>
-                    </a:lnB>
-                    <a:solidFill>
-                      <a:srgbClr val="E7EAEC"/>
-                    </a:solidFill>
-                  </a:tcPr>
-                </a:tc>
-                <a:tc>
-                  <a:txBody>
-                    <a:bodyPr/>
-                    <a:lstStyle/>
-                    <a:p>
-                      <a:pPr algn="ctr">
-                        <a:lnSpc>
-                          <a:spcPct val="100000"/>
-                        </a:lnSpc>
-                      </a:pPr>
-                      <a:r>
-                        <a:rPr lang="es-ES" sz="1200" b="0" strike="noStrike" spc="-1" dirty="0">
-                          <a:solidFill>
-                            <a:srgbClr val="000000"/>
-                          </a:solidFill>
-                          <a:latin typeface="Aptos"/>
-                          <a:ea typeface="DejaVu Sans"/>
-                        </a:rPr>
-                        <a:t>ENST00000374080.8:c.629C&gt;T</a:t>
-                      </a:r>
-                      <a:endParaRPr lang="es-ES" sz="1200" b="0" strike="noStrike" spc="-1" dirty="0">
                         <a:latin typeface="Arial"/>
                       </a:endParaRPr>
                     </a:p>
@@ -7054,724 +7723,6 @@
                           <a:latin typeface="Aptos"/>
                           <a:ea typeface="DejaVu Sans"/>
                         </a:rPr>
-                        <a:t>hemicigoto</a:t>
-                      </a:r>
-                      <a:endParaRPr lang="es-ES" sz="1200" b="0" strike="noStrike" spc="-1">
-                        <a:latin typeface="Arial"/>
-                      </a:endParaRPr>
-                    </a:p>
-                  </a:txBody>
-                  <a:tcPr marL="7560" marR="7560">
-                    <a:lnL w="12240">
-                      <a:solidFill>
-                        <a:srgbClr val="FFFFFF"/>
-                      </a:solidFill>
-                    </a:lnL>
-                    <a:lnR w="12240">
-                      <a:solidFill>
-                        <a:srgbClr val="FFFFFF"/>
-                      </a:solidFill>
-                    </a:lnR>
-                    <a:lnT w="12240">
-                      <a:solidFill>
-                        <a:srgbClr val="FFFFFF"/>
-                      </a:solidFill>
-                    </a:lnT>
-                    <a:lnB w="12240">
-                      <a:solidFill>
-                        <a:srgbClr val="FFFFFF"/>
-                      </a:solidFill>
-                    </a:lnB>
-                    <a:solidFill>
-                      <a:srgbClr val="E7EAEC"/>
-                    </a:solidFill>
-                  </a:tcPr>
-                </a:tc>
-                <a:tc>
-                  <a:txBody>
-                    <a:bodyPr/>
-                    <a:lstStyle/>
-                    <a:p>
-                      <a:pPr algn="ctr">
-                        <a:lnSpc>
-                          <a:spcPct val="100000"/>
-                        </a:lnSpc>
-                      </a:pPr>
-                      <a:r>
-                        <a:rPr lang="es-ES" sz="1200" b="0" strike="noStrike" spc="-1">
-                          <a:solidFill>
-                            <a:srgbClr val="000000"/>
-                          </a:solidFill>
-                          <a:latin typeface="Aptos"/>
-                          <a:ea typeface="DejaVu Sans"/>
-                        </a:rPr>
-                        <a:t>4.553x10-6 (mutación)</a:t>
-                      </a:r>
-                      <a:endParaRPr lang="es-ES" sz="1200" b="0" strike="noStrike" spc="-1">
-                        <a:latin typeface="Arial"/>
-                      </a:endParaRPr>
-                    </a:p>
-                  </a:txBody>
-                  <a:tcPr marL="7560" marR="7560">
-                    <a:lnL w="12240">
-                      <a:solidFill>
-                        <a:srgbClr val="FFFFFF"/>
-                      </a:solidFill>
-                    </a:lnL>
-                    <a:lnR w="12240">
-                      <a:solidFill>
-                        <a:srgbClr val="FFFFFF"/>
-                      </a:solidFill>
-                    </a:lnR>
-                    <a:lnT w="12240">
-                      <a:solidFill>
-                        <a:srgbClr val="FFFFFF"/>
-                      </a:solidFill>
-                    </a:lnT>
-                    <a:lnB w="12240">
-                      <a:solidFill>
-                        <a:srgbClr val="FFFFFF"/>
-                      </a:solidFill>
-                    </a:lnB>
-                    <a:solidFill>
-                      <a:srgbClr val="E7EAEC"/>
-                    </a:solidFill>
-                  </a:tcPr>
-                </a:tc>
-                <a:tc>
-                  <a:txBody>
-                    <a:bodyPr/>
-                    <a:lstStyle/>
-                    <a:p>
-                      <a:pPr algn="ctr">
-                        <a:lnSpc>
-                          <a:spcPct val="100000"/>
-                        </a:lnSpc>
-                      </a:pPr>
-                      <a:r>
-                        <a:rPr lang="es-ES" sz="1200" b="0" strike="noStrike" spc="-1">
-                          <a:solidFill>
-                            <a:srgbClr val="000000"/>
-                          </a:solidFill>
-                          <a:latin typeface="Aptos"/>
-                          <a:ea typeface="DejaVu Sans"/>
-                        </a:rPr>
-                        <a:t>ENST00000374080.8</a:t>
-                      </a:r>
-                      <a:endParaRPr lang="es-ES" sz="1200" b="0" strike="noStrike" spc="-1">
-                        <a:latin typeface="Arial"/>
-                      </a:endParaRPr>
-                    </a:p>
-                  </a:txBody>
-                  <a:tcPr marL="7560" marR="7560">
-                    <a:lnL w="12240">
-                      <a:solidFill>
-                        <a:srgbClr val="FFFFFF"/>
-                      </a:solidFill>
-                    </a:lnL>
-                    <a:lnR w="12240">
-                      <a:solidFill>
-                        <a:srgbClr val="FFFFFF"/>
-                      </a:solidFill>
-                    </a:lnR>
-                    <a:lnT w="12240">
-                      <a:solidFill>
-                        <a:srgbClr val="FFFFFF"/>
-                      </a:solidFill>
-                    </a:lnT>
-                    <a:lnB w="12240">
-                      <a:solidFill>
-                        <a:srgbClr val="FFFFFF"/>
-                      </a:solidFill>
-                    </a:lnB>
-                    <a:solidFill>
-                      <a:srgbClr val="E7EAEC"/>
-                    </a:solidFill>
-                  </a:tcPr>
-                </a:tc>
-                <a:tc>
-                  <a:txBody>
-                    <a:bodyPr/>
-                    <a:lstStyle/>
-                    <a:p>
-                      <a:pPr algn="ctr">
-                        <a:lnSpc>
-                          <a:spcPct val="100000"/>
-                        </a:lnSpc>
-                      </a:pPr>
-                      <a:r>
-                        <a:rPr lang="es-ES" sz="1200" b="0" strike="noStrike" spc="-1">
-                          <a:solidFill>
-                            <a:srgbClr val="000000"/>
-                          </a:solidFill>
-                          <a:latin typeface="Aptos"/>
-                          <a:ea typeface="DejaVu Sans"/>
-                        </a:rPr>
-                        <a:t>ENSP00000363193.3:p.Ala210Val</a:t>
-                      </a:r>
-                      <a:endParaRPr lang="es-ES" sz="1200" b="0" strike="noStrike" spc="-1">
-                        <a:latin typeface="Arial"/>
-                      </a:endParaRPr>
-                    </a:p>
-                  </a:txBody>
-                  <a:tcPr marL="7560" marR="7560">
-                    <a:lnL w="12240">
-                      <a:solidFill>
-                        <a:srgbClr val="FFFFFF"/>
-                      </a:solidFill>
-                    </a:lnL>
-                    <a:lnR w="12240">
-                      <a:solidFill>
-                        <a:srgbClr val="FFFFFF"/>
-                      </a:solidFill>
-                    </a:lnR>
-                    <a:lnT w="12240">
-                      <a:solidFill>
-                        <a:srgbClr val="FFFFFF"/>
-                      </a:solidFill>
-                    </a:lnT>
-                    <a:lnB w="12240">
-                      <a:solidFill>
-                        <a:srgbClr val="FFFFFF"/>
-                      </a:solidFill>
-                    </a:lnB>
-                    <a:solidFill>
-                      <a:srgbClr val="E7EAEC"/>
-                    </a:solidFill>
-                  </a:tcPr>
-                </a:tc>
-                <a:tc>
-                  <a:txBody>
-                    <a:bodyPr/>
-                    <a:lstStyle/>
-                    <a:p>
-                      <a:pPr algn="ctr">
-                        <a:lnSpc>
-                          <a:spcPct val="100000"/>
-                        </a:lnSpc>
-                      </a:pPr>
-                      <a:r>
-                        <a:rPr lang="es-ES" sz="1200" b="0" strike="noStrike" spc="-1">
-                          <a:solidFill>
-                            <a:srgbClr val="000000"/>
-                          </a:solidFill>
-                          <a:latin typeface="Aptos"/>
-                          <a:ea typeface="DejaVu Sans"/>
-                        </a:rPr>
-                        <a:t>Missense</a:t>
-                      </a:r>
-                      <a:endParaRPr lang="es-ES" sz="1200" b="0" strike="noStrike" spc="-1">
-                        <a:latin typeface="Arial"/>
-                      </a:endParaRPr>
-                    </a:p>
-                  </a:txBody>
-                  <a:tcPr marL="7560" marR="7560">
-                    <a:lnL w="12240">
-                      <a:solidFill>
-                        <a:srgbClr val="FFFFFF"/>
-                      </a:solidFill>
-                    </a:lnL>
-                    <a:lnR w="12240">
-                      <a:solidFill>
-                        <a:srgbClr val="FFFFFF"/>
-                      </a:solidFill>
-                    </a:lnR>
-                    <a:lnT w="12240">
-                      <a:solidFill>
-                        <a:srgbClr val="FFFFFF"/>
-                      </a:solidFill>
-                    </a:lnT>
-                    <a:lnB w="12240">
-                      <a:solidFill>
-                        <a:srgbClr val="FFFFFF"/>
-                      </a:solidFill>
-                    </a:lnB>
-                    <a:solidFill>
-                      <a:srgbClr val="E7EAEC"/>
-                    </a:solidFill>
-                  </a:tcPr>
-                </a:tc>
-                <a:tc>
-                  <a:txBody>
-                    <a:bodyPr/>
-                    <a:lstStyle/>
-                    <a:p>
-                      <a:pPr algn="ctr">
-                        <a:lnSpc>
-                          <a:spcPct val="100000"/>
-                        </a:lnSpc>
-                      </a:pPr>
-                      <a:r>
-                        <a:rPr lang="es-ES" sz="1200" b="0" strike="noStrike" spc="-1">
-                          <a:solidFill>
-                            <a:srgbClr val="000000"/>
-                          </a:solidFill>
-                          <a:latin typeface="Aptos"/>
-                          <a:ea typeface="DejaVu Sans"/>
-                        </a:rPr>
-                        <a:t>deleterious low confidence (0.02)</a:t>
-                      </a:r>
-                      <a:endParaRPr lang="es-ES" sz="1200" b="0" strike="noStrike" spc="-1">
-                        <a:latin typeface="Arial"/>
-                      </a:endParaRPr>
-                    </a:p>
-                  </a:txBody>
-                  <a:tcPr marL="7560" marR="7560">
-                    <a:lnL w="12240">
-                      <a:solidFill>
-                        <a:srgbClr val="FFFFFF"/>
-                      </a:solidFill>
-                    </a:lnL>
-                    <a:lnR w="12240">
-                      <a:solidFill>
-                        <a:srgbClr val="FFFFFF"/>
-                      </a:solidFill>
-                    </a:lnR>
-                    <a:lnT w="12240">
-                      <a:solidFill>
-                        <a:srgbClr val="FFFFFF"/>
-                      </a:solidFill>
-                    </a:lnT>
-                    <a:lnB w="12240">
-                      <a:solidFill>
-                        <a:srgbClr val="FFFFFF"/>
-                      </a:solidFill>
-                    </a:lnB>
-                    <a:solidFill>
-                      <a:srgbClr val="E7EAEC"/>
-                    </a:solidFill>
-                  </a:tcPr>
-                </a:tc>
-                <a:tc>
-                  <a:txBody>
-                    <a:bodyPr/>
-                    <a:lstStyle/>
-                    <a:p>
-                      <a:pPr algn="ctr">
-                        <a:lnSpc>
-                          <a:spcPct val="100000"/>
-                        </a:lnSpc>
-                      </a:pPr>
-                      <a:r>
-                        <a:rPr lang="es-ES" sz="1200" b="0" strike="noStrike" spc="-1">
-                          <a:solidFill>
-                            <a:srgbClr val="000000"/>
-                          </a:solidFill>
-                          <a:latin typeface="Aptos"/>
-                          <a:ea typeface="DejaVu Sans"/>
-                        </a:rPr>
-                        <a:t>benign (0.19)</a:t>
-                      </a:r>
-                      <a:endParaRPr lang="es-ES" sz="1200" b="0" strike="noStrike" spc="-1">
-                        <a:latin typeface="Arial"/>
-                      </a:endParaRPr>
-                    </a:p>
-                  </a:txBody>
-                  <a:tcPr marL="7560" marR="7560">
-                    <a:lnL w="12240">
-                      <a:solidFill>
-                        <a:srgbClr val="FFFFFF"/>
-                      </a:solidFill>
-                    </a:lnL>
-                    <a:lnR w="12240">
-                      <a:solidFill>
-                        <a:srgbClr val="FFFFFF"/>
-                      </a:solidFill>
-                    </a:lnR>
-                    <a:lnT w="12240">
-                      <a:solidFill>
-                        <a:srgbClr val="FFFFFF"/>
-                      </a:solidFill>
-                    </a:lnT>
-                    <a:lnB w="12240">
-                      <a:solidFill>
-                        <a:srgbClr val="FFFFFF"/>
-                      </a:solidFill>
-                    </a:lnB>
-                    <a:solidFill>
-                      <a:srgbClr val="E7EAEC"/>
-                    </a:solidFill>
-                  </a:tcPr>
-                </a:tc>
-                <a:tc>
-                  <a:txBody>
-                    <a:bodyPr/>
-                    <a:lstStyle/>
-                    <a:p>
-                      <a:pPr algn="ctr">
-                        <a:lnSpc>
-                          <a:spcPct val="100000"/>
-                        </a:lnSpc>
-                      </a:pPr>
-                      <a:r>
-                        <a:rPr lang="es-ES" sz="1200" b="0" strike="noStrike" spc="-1" dirty="0" smtClean="0">
-                          <a:solidFill>
-                            <a:srgbClr val="000000"/>
-                          </a:solidFill>
-                          <a:latin typeface="Aptos"/>
-                          <a:ea typeface="+mn-ea"/>
-                        </a:rPr>
-                        <a:t># 305450</a:t>
-                      </a:r>
-                      <a:endParaRPr lang="es-ES" sz="1200" b="0" strike="noStrike" spc="-1" dirty="0">
-                        <a:latin typeface="Arial"/>
-                      </a:endParaRPr>
-                    </a:p>
-                  </a:txBody>
-                  <a:tcPr marL="7560" marR="7560">
-                    <a:lnL w="12240">
-                      <a:solidFill>
-                        <a:srgbClr val="FFFFFF"/>
-                      </a:solidFill>
-                    </a:lnL>
-                    <a:lnR w="12240">
-                      <a:solidFill>
-                        <a:srgbClr val="FFFFFF"/>
-                      </a:solidFill>
-                    </a:lnR>
-                    <a:lnT w="12240">
-                      <a:solidFill>
-                        <a:srgbClr val="FFFFFF"/>
-                      </a:solidFill>
-                    </a:lnT>
-                    <a:lnB w="12240">
-                      <a:solidFill>
-                        <a:srgbClr val="FFFFFF"/>
-                      </a:solidFill>
-                    </a:lnB>
-                    <a:solidFill>
-                      <a:srgbClr val="E7EAEC"/>
-                    </a:solidFill>
-                  </a:tcPr>
-                </a:tc>
-                <a:tc>
-                  <a:txBody>
-                    <a:bodyPr/>
-                    <a:lstStyle/>
-                    <a:p>
-                      <a:pPr algn="ctr">
-                        <a:lnSpc>
-                          <a:spcPct val="100000"/>
-                        </a:lnSpc>
-                      </a:pPr>
-                      <a:r>
-                        <a:rPr lang="es-ES" sz="1200" b="0" strike="noStrike" spc="-1" dirty="0" smtClean="0">
-                          <a:solidFill>
-                            <a:srgbClr val="000000"/>
-                          </a:solidFill>
-                          <a:latin typeface="Aptos"/>
-                          <a:ea typeface="DejaVu Sans"/>
-                        </a:rPr>
-                        <a:t>Ligada al X recesiva</a:t>
-                      </a:r>
-                    </a:p>
-                  </a:txBody>
-                  <a:tcPr marL="7560" marR="7560">
-                    <a:lnL w="12240">
-                      <a:solidFill>
-                        <a:srgbClr val="FFFFFF"/>
-                      </a:solidFill>
-                    </a:lnL>
-                    <a:lnR w="12240">
-                      <a:solidFill>
-                        <a:srgbClr val="FFFFFF"/>
-                      </a:solidFill>
-                    </a:lnR>
-                    <a:lnT w="12240">
-                      <a:solidFill>
-                        <a:srgbClr val="FFFFFF"/>
-                      </a:solidFill>
-                    </a:lnT>
-                    <a:lnB w="12240">
-                      <a:solidFill>
-                        <a:srgbClr val="FFFFFF"/>
-                      </a:solidFill>
-                    </a:lnB>
-                    <a:solidFill>
-                      <a:srgbClr val="E7EAEC"/>
-                    </a:solidFill>
-                  </a:tcPr>
-                </a:tc>
-                <a:tc>
-                  <a:txBody>
-                    <a:bodyPr/>
-                    <a:lstStyle/>
-                    <a:p>
-                      <a:pPr algn="ctr">
-                        <a:lnSpc>
-                          <a:spcPct val="100000"/>
-                        </a:lnSpc>
-                      </a:pPr>
-                      <a:r>
-                        <a:rPr lang="es-ES" sz="1200" b="0" strike="noStrike" spc="-1">
-                          <a:solidFill>
-                            <a:srgbClr val="000000"/>
-                          </a:solidFill>
-                          <a:latin typeface="Aptos"/>
-                          <a:ea typeface="DejaVu Sans"/>
-                        </a:rPr>
-                        <a:t>Vía de señalización de la hormona tiroidea</a:t>
-                      </a:r>
-                      <a:endParaRPr lang="es-ES" sz="1200" b="0" strike="noStrike" spc="-1">
-                        <a:latin typeface="Arial"/>
-                      </a:endParaRPr>
-                    </a:p>
-                  </a:txBody>
-                  <a:tcPr marL="7560" marR="7560">
-                    <a:lnL w="12240">
-                      <a:solidFill>
-                        <a:srgbClr val="FFFFFF"/>
-                      </a:solidFill>
-                    </a:lnL>
-                    <a:lnR w="12240">
-                      <a:solidFill>
-                        <a:srgbClr val="FFFFFF"/>
-                      </a:solidFill>
-                    </a:lnR>
-                    <a:lnT w="12240">
-                      <a:solidFill>
-                        <a:srgbClr val="FFFFFF"/>
-                      </a:solidFill>
-                    </a:lnT>
-                    <a:lnB w="12240">
-                      <a:solidFill>
-                        <a:srgbClr val="FFFFFF"/>
-                      </a:solidFill>
-                    </a:lnB>
-                    <a:solidFill>
-                      <a:srgbClr val="E7EAEC"/>
-                    </a:solidFill>
-                  </a:tcPr>
-                </a:tc>
-                <a:extLst>
-                  <a:ext uri="{0D108BD9-81ED-4DB2-BD59-A6C34878D82A}">
-                    <a16:rowId xmlns:a16="http://schemas.microsoft.com/office/drawing/2014/main" val="10003"/>
-                  </a:ext>
-                </a:extLst>
-              </a:tr>
-              <a:tr h="433080">
-                <a:tc>
-                  <a:txBody>
-                    <a:bodyPr/>
-                    <a:lstStyle/>
-                    <a:p>
-                      <a:pPr>
-                        <a:lnSpc>
-                          <a:spcPct val="100000"/>
-                        </a:lnSpc>
-                      </a:pPr>
-                      <a:r>
-                        <a:rPr lang="es-ES" sz="1200" b="0" strike="noStrike" spc="-1">
-                          <a:solidFill>
-                            <a:srgbClr val="000000"/>
-                          </a:solidFill>
-                          <a:latin typeface="Aptos"/>
-                          <a:ea typeface="DejaVu Sans"/>
-                        </a:rPr>
-                        <a:t>TP53</a:t>
-                      </a:r>
-                      <a:endParaRPr lang="es-ES" sz="1200" b="0" strike="noStrike" spc="-1">
-                        <a:latin typeface="Arial"/>
-                      </a:endParaRPr>
-                    </a:p>
-                  </a:txBody>
-                  <a:tcPr marL="7560" marR="7560">
-                    <a:lnL w="12240">
-                      <a:solidFill>
-                        <a:srgbClr val="FFFFFF"/>
-                      </a:solidFill>
-                    </a:lnL>
-                    <a:lnR w="12240">
-                      <a:solidFill>
-                        <a:srgbClr val="FFFFFF"/>
-                      </a:solidFill>
-                    </a:lnR>
-                    <a:lnT w="12240">
-                      <a:solidFill>
-                        <a:srgbClr val="FFFFFF"/>
-                      </a:solidFill>
-                    </a:lnT>
-                    <a:lnB w="12240">
-                      <a:solidFill>
-                        <a:srgbClr val="FFFFFF"/>
-                      </a:solidFill>
-                    </a:lnB>
-                    <a:solidFill>
-                      <a:srgbClr val="E7EAEC"/>
-                    </a:solidFill>
-                  </a:tcPr>
-                </a:tc>
-                <a:tc>
-                  <a:txBody>
-                    <a:bodyPr/>
-                    <a:lstStyle/>
-                    <a:p>
-                      <a:pPr algn="ctr">
-                        <a:lnSpc>
-                          <a:spcPct val="100000"/>
-                        </a:lnSpc>
-                      </a:pPr>
-                      <a:r>
-                        <a:rPr lang="es-ES" sz="1200" b="0" strike="noStrike" spc="-1">
-                          <a:solidFill>
-                            <a:srgbClr val="000000"/>
-                          </a:solidFill>
-                          <a:latin typeface="Aptos"/>
-                          <a:ea typeface="DejaVu Sans"/>
-                        </a:rPr>
-                        <a:t>17:7676154</a:t>
-                      </a:r>
-                      <a:endParaRPr lang="es-ES" sz="1200" b="0" strike="noStrike" spc="-1">
-                        <a:latin typeface="Arial"/>
-                      </a:endParaRPr>
-                    </a:p>
-                  </a:txBody>
-                  <a:tcPr marL="7560" marR="7560">
-                    <a:lnL w="12240">
-                      <a:solidFill>
-                        <a:srgbClr val="FFFFFF"/>
-                      </a:solidFill>
-                    </a:lnL>
-                    <a:lnR w="12240">
-                      <a:solidFill>
-                        <a:srgbClr val="FFFFFF"/>
-                      </a:solidFill>
-                    </a:lnR>
-                    <a:lnT w="12240">
-                      <a:solidFill>
-                        <a:srgbClr val="FFFFFF"/>
-                      </a:solidFill>
-                    </a:lnT>
-                    <a:lnB w="12240">
-                      <a:solidFill>
-                        <a:srgbClr val="FFFFFF"/>
-                      </a:solidFill>
-                    </a:lnB>
-                    <a:solidFill>
-                      <a:srgbClr val="E7EAEC"/>
-                    </a:solidFill>
-                  </a:tcPr>
-                </a:tc>
-                <a:tc>
-                  <a:txBody>
-                    <a:bodyPr/>
-                    <a:lstStyle/>
-                    <a:p>
-                      <a:pPr algn="ctr">
-                        <a:lnSpc>
-                          <a:spcPct val="100000"/>
-                        </a:lnSpc>
-                      </a:pPr>
-                      <a:r>
-                        <a:rPr lang="es-ES" sz="1200" b="0" strike="noStrike" spc="-1">
-                          <a:solidFill>
-                            <a:srgbClr val="000000"/>
-                          </a:solidFill>
-                          <a:latin typeface="Aptos"/>
-                          <a:ea typeface="DejaVu Sans"/>
-                        </a:rPr>
-                        <a:t>ENST00000269305.9:c.215C&gt;T</a:t>
-                      </a:r>
-                      <a:endParaRPr lang="es-ES" sz="1200" b="0" strike="noStrike" spc="-1">
-                        <a:latin typeface="Arial"/>
-                      </a:endParaRPr>
-                    </a:p>
-                  </a:txBody>
-                  <a:tcPr marL="7560" marR="7560">
-                    <a:lnL w="12240">
-                      <a:solidFill>
-                        <a:srgbClr val="FFFFFF"/>
-                      </a:solidFill>
-                    </a:lnL>
-                    <a:lnR w="12240">
-                      <a:solidFill>
-                        <a:srgbClr val="FFFFFF"/>
-                      </a:solidFill>
-                    </a:lnR>
-                    <a:lnT w="12240">
-                      <a:solidFill>
-                        <a:srgbClr val="FFFFFF"/>
-                      </a:solidFill>
-                    </a:lnT>
-                    <a:lnB w="12240">
-                      <a:solidFill>
-                        <a:srgbClr val="FFFFFF"/>
-                      </a:solidFill>
-                    </a:lnB>
-                    <a:solidFill>
-                      <a:srgbClr val="E7EAEC"/>
-                    </a:solidFill>
-                  </a:tcPr>
-                </a:tc>
-                <a:tc>
-                  <a:txBody>
-                    <a:bodyPr/>
-                    <a:lstStyle/>
-                    <a:p>
-                      <a:pPr algn="ctr">
-                        <a:lnSpc>
-                          <a:spcPct val="100000"/>
-                        </a:lnSpc>
-                      </a:pPr>
-                      <a:r>
-                        <a:rPr lang="es-ES" sz="1200" b="0" strike="noStrike" spc="-1">
-                          <a:solidFill>
-                            <a:srgbClr val="000000"/>
-                          </a:solidFill>
-                          <a:latin typeface="Aptos"/>
-                          <a:ea typeface="DejaVu Sans"/>
-                        </a:rPr>
-                        <a:t>SNP</a:t>
-                      </a:r>
-                      <a:endParaRPr lang="es-ES" sz="1200" b="0" strike="noStrike" spc="-1">
-                        <a:latin typeface="Arial"/>
-                      </a:endParaRPr>
-                    </a:p>
-                  </a:txBody>
-                  <a:tcPr marL="7560" marR="7560">
-                    <a:lnL w="12240">
-                      <a:solidFill>
-                        <a:srgbClr val="FFFFFF"/>
-                      </a:solidFill>
-                    </a:lnL>
-                    <a:lnR w="12240">
-                      <a:solidFill>
-                        <a:srgbClr val="FFFFFF"/>
-                      </a:solidFill>
-                    </a:lnR>
-                    <a:lnT w="12240">
-                      <a:solidFill>
-                        <a:srgbClr val="FFFFFF"/>
-                      </a:solidFill>
-                    </a:lnT>
-                    <a:lnB w="12240">
-                      <a:solidFill>
-                        <a:srgbClr val="FFFFFF"/>
-                      </a:solidFill>
-                    </a:lnB>
-                    <a:solidFill>
-                      <a:srgbClr val="E7EAEC"/>
-                    </a:solidFill>
-                  </a:tcPr>
-                </a:tc>
-                <a:tc>
-                  <a:txBody>
-                    <a:bodyPr/>
-                    <a:lstStyle/>
-                    <a:p>
-                      <a:pPr algn="ctr">
-                        <a:lnSpc>
-                          <a:spcPct val="100000"/>
-                        </a:lnSpc>
-                      </a:pPr>
-                      <a:r>
-                        <a:rPr lang="es-ES" sz="1200" b="0" strike="noStrike" spc="-1">
-                          <a:solidFill>
-                            <a:srgbClr val="000000"/>
-                          </a:solidFill>
-                          <a:latin typeface="Aptos"/>
-                          <a:ea typeface="DejaVu Sans"/>
-                        </a:rPr>
                         <a:t>heterocigoto</a:t>
                       </a:r>
                       <a:endParaRPr lang="es-ES" sz="1200" b="0" strike="noStrike" spc="-1">
@@ -7969,7 +7920,7 @@
                         </a:lnSpc>
                       </a:pPr>
                       <a:r>
-                        <a:rPr lang="es-ES" sz="1200" b="0" strike="noStrike" spc="-1">
+                        <a:rPr lang="es-ES" sz="1200" b="0" strike="noStrike" spc="-1" dirty="0" err="1">
                           <a:solidFill>
                             <a:srgbClr val="000000"/>
                           </a:solidFill>
@@ -7978,7 +7929,7 @@
                         </a:rPr>
                         <a:t>Missense</a:t>
                       </a:r>
-                      <a:endParaRPr lang="es-ES" sz="1200" b="0" strike="noStrike" spc="-1">
+                      <a:endParaRPr lang="es-ES" sz="1200" b="0" strike="noStrike" spc="-1" dirty="0">
                         <a:latin typeface="Arial"/>
                       </a:endParaRPr>
                     </a:p>
@@ -8020,16 +7971,26 @@
                         </a:lnSpc>
                       </a:pPr>
                       <a:r>
-                        <a:rPr lang="es-ES" sz="1200" b="0" strike="noStrike" spc="-1">
+                        <a:rPr lang="es-ES" sz="1200" b="0" strike="noStrike" spc="-1" dirty="0" err="1">
                           <a:solidFill>
                             <a:srgbClr val="000000"/>
                           </a:solidFill>
                           <a:latin typeface="Aptos"/>
                           <a:ea typeface="DejaVu Sans"/>
                         </a:rPr>
-                        <a:t>tolerated (0.13)</a:t>
+                        <a:t>tolerated</a:t>
                       </a:r>
-                      <a:endParaRPr lang="es-ES" sz="1200" b="0" strike="noStrike" spc="-1">
+                      <a:r>
+                        <a:rPr lang="es-ES" sz="1200" b="0" strike="noStrike" spc="-1" dirty="0">
+                          <a:solidFill>
+                            <a:srgbClr val="000000"/>
+                          </a:solidFill>
+                          <a:latin typeface="Aptos"/>
+                          <a:ea typeface="DejaVu Sans"/>
+                        </a:rPr>
+                        <a:t> (0.13)</a:t>
+                      </a:r>
+                      <a:endParaRPr lang="es-ES" sz="1200" b="0" strike="noStrike" spc="-1" dirty="0">
                         <a:latin typeface="Arial"/>
                       </a:endParaRPr>
                     </a:p>
@@ -8071,16 +8032,26 @@
                         </a:lnSpc>
                       </a:pPr>
                       <a:r>
-                        <a:rPr lang="es-ES" sz="1200" b="0" strike="noStrike" spc="-1">
+                        <a:rPr lang="es-ES" sz="1200" b="0" strike="noStrike" spc="-1" dirty="0" err="1">
                           <a:solidFill>
                             <a:srgbClr val="000000"/>
                           </a:solidFill>
                           <a:latin typeface="Aptos"/>
                           <a:ea typeface="DejaVu Sans"/>
                         </a:rPr>
-                        <a:t>benign (0.003)</a:t>
+                        <a:t>benign</a:t>
                       </a:r>
-                      <a:endParaRPr lang="es-ES" sz="1200" b="0" strike="noStrike" spc="-1">
+                      <a:r>
+                        <a:rPr lang="es-ES" sz="1200" b="0" strike="noStrike" spc="-1" dirty="0">
+                          <a:solidFill>
+                            <a:srgbClr val="000000"/>
+                          </a:solidFill>
+                          <a:latin typeface="Aptos"/>
+                          <a:ea typeface="DejaVu Sans"/>
+                        </a:rPr>
+                        <a:t> (0.003)</a:t>
+                      </a:r>
+                      <a:endParaRPr lang="es-ES" sz="1200" b="0" strike="noStrike" spc="-1" dirty="0">
                         <a:latin typeface="Arial"/>
                       </a:endParaRPr>
                     </a:p>
@@ -8122,7 +8093,7 @@
                         </a:lnSpc>
                       </a:pPr>
                       <a:r>
-                        <a:rPr lang="es-ES" sz="1200" b="0" strike="noStrike" spc="-1" dirty="0" smtClean="0">
+                        <a:rPr lang="es-ES" sz="1200" b="0" strike="noStrike" spc="-1" dirty="0">
                           <a:solidFill>
                             <a:srgbClr val="000000"/>
                           </a:solidFill>
@@ -8173,7 +8144,7 @@
                         </a:lnSpc>
                       </a:pPr>
                       <a:r>
-                        <a:rPr lang="es-ES" sz="1200" b="0" strike="noStrike" spc="-1">
+                        <a:rPr lang="es-ES" sz="1200" b="0" strike="noStrike" spc="-1" dirty="0">
                           <a:solidFill>
                             <a:srgbClr val="000000"/>
                           </a:solidFill>
@@ -8182,7 +8153,7 @@
                         </a:rPr>
                         <a:t>Autosómica dominante</a:t>
                       </a:r>
-                      <a:endParaRPr lang="es-ES" sz="1200" b="0" strike="noStrike" spc="-1">
+                      <a:endParaRPr lang="es-ES" sz="1200" b="0" strike="noStrike" spc="-1" dirty="0">
                         <a:latin typeface="Arial"/>
                       </a:endParaRPr>
                     </a:p>
